--- a/Parfümvilág.pptx
+++ b/Parfümvilág.pptx
@@ -11,6 +11,8 @@
     <p:sldId id="259" r:id="rId5"/>
     <p:sldId id="260" r:id="rId6"/>
     <p:sldId id="261" r:id="rId7"/>
+    <p:sldId id="262" r:id="rId8"/>
+    <p:sldId id="263" r:id="rId9"/>
   </p:sldIdLst>
   <p:sldSz cx="12192000" cy="6858000"/>
   <p:notesSz cx="6858000" cy="9144000"/>
@@ -109,6 +111,11 @@
       </a:defRPr>
     </a:lvl9pPr>
   </p:defaultTextStyle>
+  <p:extLst>
+    <p:ext uri="{EFAFB233-063F-42B5-8137-9DF3F51BA10A}">
+      <p15:sldGuideLst xmlns:p15="http://schemas.microsoft.com/office/powerpoint/2012/main"/>
+    </p:ext>
+  </p:extLst>
 </p:presentation>
 </file>
 
@@ -358,7 +365,7 @@
             <a:fld id="{B61BEF0D-F0BB-DE4B-95CE-6DB70DBA9567}" type="datetimeFigureOut">
               <a:rPr lang="en-US" dirty="0"/>
               <a:pPr/>
-              <a:t>3/31/2025</a:t>
+              <a:t>4/1/2025</a:t>
             </a:fld>
             <a:endParaRPr lang="en-US" dirty="0"/>
           </a:p>
@@ -617,7 +624,7 @@
             <a:fld id="{B61BEF0D-F0BB-DE4B-95CE-6DB70DBA9567}" type="datetimeFigureOut">
               <a:rPr lang="en-US" dirty="0"/>
               <a:pPr/>
-              <a:t>3/31/2025</a:t>
+              <a:t>4/1/2025</a:t>
             </a:fld>
             <a:endParaRPr lang="en-US" dirty="0"/>
           </a:p>
@@ -849,7 +856,7 @@
             <a:fld id="{B61BEF0D-F0BB-DE4B-95CE-6DB70DBA9567}" type="datetimeFigureOut">
               <a:rPr lang="en-US" dirty="0"/>
               <a:pPr/>
-              <a:t>3/31/2025</a:t>
+              <a:t>4/1/2025</a:t>
             </a:fld>
             <a:endParaRPr lang="en-US" dirty="0"/>
           </a:p>
@@ -1086,7 +1093,7 @@
             <a:fld id="{B61BEF0D-F0BB-DE4B-95CE-6DB70DBA9567}" type="datetimeFigureOut">
               <a:rPr lang="en-US" dirty="0"/>
               <a:pPr/>
-              <a:t>3/31/2025</a:t>
+              <a:t>4/1/2025</a:t>
             </a:fld>
             <a:endParaRPr lang="en-US" dirty="0"/>
           </a:p>
@@ -1390,7 +1397,7 @@
             <a:fld id="{B61BEF0D-F0BB-DE4B-95CE-6DB70DBA9567}" type="datetimeFigureOut">
               <a:rPr lang="en-US" dirty="0"/>
               <a:pPr/>
-              <a:t>3/31/2025</a:t>
+              <a:t>4/1/2025</a:t>
             </a:fld>
             <a:endParaRPr lang="en-US" dirty="0"/>
           </a:p>
@@ -1689,7 +1696,7 @@
             <a:fld id="{B61BEF0D-F0BB-DE4B-95CE-6DB70DBA9567}" type="datetimeFigureOut">
               <a:rPr lang="en-US" dirty="0"/>
               <a:pPr/>
-              <a:t>3/31/2025</a:t>
+              <a:t>4/1/2025</a:t>
             </a:fld>
             <a:endParaRPr lang="en-US" dirty="0"/>
           </a:p>
@@ -2108,7 +2115,7 @@
             <a:fld id="{B61BEF0D-F0BB-DE4B-95CE-6DB70DBA9567}" type="datetimeFigureOut">
               <a:rPr lang="en-US" dirty="0"/>
               <a:pPr/>
-              <a:t>3/31/2025</a:t>
+              <a:t>4/1/2025</a:t>
             </a:fld>
             <a:endParaRPr lang="en-US" dirty="0"/>
           </a:p>
@@ -2267,7 +2274,7 @@
             <a:fld id="{B61BEF0D-F0BB-DE4B-95CE-6DB70DBA9567}" type="datetimeFigureOut">
               <a:rPr lang="en-US" dirty="0"/>
               <a:pPr/>
-              <a:t>3/31/2025</a:t>
+              <a:t>4/1/2025</a:t>
             </a:fld>
             <a:endParaRPr lang="en-US" dirty="0"/>
           </a:p>
@@ -2359,7 +2366,7 @@
             <a:fld id="{B61BEF0D-F0BB-DE4B-95CE-6DB70DBA9567}" type="datetimeFigureOut">
               <a:rPr lang="en-US" dirty="0"/>
               <a:pPr/>
-              <a:t>3/31/2025</a:t>
+              <a:t>4/1/2025</a:t>
             </a:fld>
             <a:endParaRPr lang="en-US" dirty="0"/>
           </a:p>
@@ -2734,7 +2741,7 @@
             <a:fld id="{B61BEF0D-F0BB-DE4B-95CE-6DB70DBA9567}" type="datetimeFigureOut">
               <a:rPr lang="en-US" dirty="0"/>
               <a:pPr/>
-              <a:t>3/31/2025</a:t>
+              <a:t>4/1/2025</a:t>
             </a:fld>
             <a:endParaRPr lang="en-US" dirty="0"/>
           </a:p>
@@ -3020,7 +3027,7 @@
             <a:fld id="{B61BEF0D-F0BB-DE4B-95CE-6DB70DBA9567}" type="datetimeFigureOut">
               <a:rPr lang="en-US" dirty="0"/>
               <a:pPr/>
-              <a:t>3/31/2025</a:t>
+              <a:t>4/1/2025</a:t>
             </a:fld>
             <a:endParaRPr lang="en-US" dirty="0"/>
           </a:p>
@@ -3228,7 +3235,7 @@
             <a:fld id="{B61BEF0D-F0BB-DE4B-95CE-6DB70DBA9567}" type="datetimeFigureOut">
               <a:rPr lang="en-US" dirty="0"/>
               <a:pPr/>
-              <a:t>3/31/2025</a:t>
+              <a:t>4/1/2025</a:t>
             </a:fld>
             <a:endParaRPr lang="en-US" dirty="0"/>
           </a:p>
@@ -3886,36 +3893,6 @@
           </a:p>
         </p:txBody>
       </p:sp>
-      <p:pic>
-        <p:nvPicPr>
-          <p:cNvPr id="4" name="Kép 3">
-            <a:extLst>
-              <a:ext uri="{FF2B5EF4-FFF2-40B4-BE49-F238E27FC236}">
-                <a16:creationId xmlns:a16="http://schemas.microsoft.com/office/drawing/2014/main" id="{CFB50EB0-CBA2-407F-8212-F60756E4C0A1}"/>
-              </a:ext>
-            </a:extLst>
-          </p:cNvPr>
-          <p:cNvPicPr>
-            <a:picLocks noChangeAspect="1"/>
-          </p:cNvPicPr>
-          <p:nvPr/>
-        </p:nvPicPr>
-        <p:blipFill>
-          <a:blip r:embed="rId2"/>
-          <a:stretch>
-            <a:fillRect/>
-          </a:stretch>
-        </p:blipFill>
-        <p:spPr>
-          <a:xfrm>
-            <a:off x="2992974" y="3170693"/>
-            <a:ext cx="6169981" cy="3032758"/>
-          </a:xfrm>
-          <a:prstGeom prst="rect">
-            <a:avLst/>
-          </a:prstGeom>
-        </p:spPr>
-      </p:pic>
     </p:spTree>
     <p:extLst>
       <p:ext uri="{BB962C8B-B14F-4D97-AF65-F5344CB8AC3E}">
@@ -3996,48 +3973,48 @@
           <a:lstStyle/>
           <a:p>
             <a:r>
-              <a:rPr lang="hu-HU" dirty="0"/>
+              <a:rPr lang="hu-HU" b="1" dirty="0"/>
               <a:t>Parfümökkel foglalkozó weboldal</a:t>
             </a:r>
           </a:p>
           <a:p>
             <a:r>
-              <a:rPr lang="hu-HU" dirty="0"/>
+              <a:rPr lang="hu-HU" b="1" dirty="0"/>
               <a:t>Hírek, újdonságok</a:t>
             </a:r>
           </a:p>
           <a:p>
             <a:r>
-              <a:rPr lang="hu-HU" dirty="0"/>
+              <a:rPr lang="hu-HU" b="1" dirty="0"/>
               <a:t>Webshopok árai, legkedvezőbb megtalálása (</a:t>
             </a:r>
             <a:r>
-              <a:rPr lang="hu-HU" dirty="0" err="1"/>
+              <a:rPr lang="hu-HU" b="1" dirty="0" err="1"/>
               <a:t>Notino</a:t>
             </a:r>
             <a:r>
-              <a:rPr lang="hu-HU" dirty="0"/>
+              <a:rPr lang="hu-HU" b="1" dirty="0"/>
               <a:t>, később bővül)</a:t>
             </a:r>
           </a:p>
           <a:p>
             <a:r>
-              <a:rPr lang="hu-HU" dirty="0" err="1"/>
+              <a:rPr lang="hu-HU" b="1" dirty="0" err="1"/>
               <a:t>Affiliate</a:t>
             </a:r>
             <a:r>
-              <a:rPr lang="hu-HU" dirty="0"/>
+              <a:rPr lang="hu-HU" b="1" dirty="0"/>
               <a:t> program keretein belül kapjuk az adatokat</a:t>
             </a:r>
           </a:p>
           <a:p>
             <a:r>
-              <a:rPr lang="hu-HU" dirty="0"/>
+              <a:rPr lang="hu-HU" b="1" dirty="0"/>
               <a:t>Értékelés, vélemény írása</a:t>
             </a:r>
           </a:p>
           <a:p>
-            <a:pPr marL="0" indent="0">
+            <a:pPr marL="0" indent="0" algn="ctr">
               <a:buNone/>
             </a:pPr>
             <a:endParaRPr lang="hu-HU" dirty="0"/>
@@ -4118,13 +4095,18 @@
             <p:ph idx="1"/>
           </p:nvPr>
         </p:nvSpPr>
-        <p:spPr/>
+        <p:spPr>
+          <a:xfrm>
+            <a:off x="2381288" y="2207130"/>
+            <a:ext cx="7429424" cy="2934916"/>
+          </a:xfrm>
+        </p:spPr>
         <p:txBody>
           <a:bodyPr/>
           <a:lstStyle/>
           <a:p>
             <a:r>
-              <a:rPr lang="hu-HU" dirty="0"/>
+              <a:rPr lang="hu-HU" b="1" dirty="0"/>
               <a:t>Azért készült el ez a weboldal, mert: </a:t>
             </a:r>
           </a:p>
@@ -4216,7 +4198,7 @@
           <a:p>
             <a:r>
               <a:rPr lang="hu-HU" dirty="0"/>
-              <a:t>Funkciók – 1.</a:t>
+              <a:t>Funkciók – Regisztráció, bejelentkezés</a:t>
             </a:r>
           </a:p>
         </p:txBody>
@@ -4239,8 +4221,8 @@
         </p:nvSpPr>
         <p:spPr>
           <a:xfrm>
-            <a:off x="276392" y="1501354"/>
-            <a:ext cx="4224587" cy="5356646"/>
+            <a:off x="622621" y="2003546"/>
+            <a:ext cx="3878358" cy="4338447"/>
           </a:xfrm>
         </p:spPr>
         <p:txBody>
@@ -4248,19 +4230,19 @@
           <a:lstStyle/>
           <a:p>
             <a:r>
-              <a:rPr lang="hu-HU" dirty="0"/>
+              <a:rPr lang="hu-HU" b="1" dirty="0"/>
               <a:t>Regisztráció, bejelentkezés</a:t>
             </a:r>
           </a:p>
           <a:p>
             <a:r>
-              <a:rPr lang="hu-HU" dirty="0"/>
+              <a:rPr lang="hu-HU" b="1" dirty="0"/>
               <a:t>Saját profil létrehozása</a:t>
             </a:r>
           </a:p>
           <a:p>
             <a:r>
-              <a:rPr lang="hu-HU" dirty="0"/>
+              <a:rPr lang="hu-HU" b="1" dirty="0"/>
               <a:t>Ezzel elérhető a véleményezés, illetve a parfümök kedvencekbe mentése. </a:t>
             </a:r>
           </a:p>
@@ -4379,7 +4361,7 @@
           <a:p>
             <a:r>
               <a:rPr lang="hu-HU" dirty="0"/>
-              <a:t>Funkciók – 2.</a:t>
+              <a:t>Funkciók – Parfümök keresése</a:t>
             </a:r>
           </a:p>
         </p:txBody>
@@ -4402,8 +4384,8 @@
         </p:nvSpPr>
         <p:spPr>
           <a:xfrm>
-            <a:off x="581191" y="2157275"/>
-            <a:ext cx="11029616" cy="3998570"/>
+            <a:off x="581192" y="2157274"/>
+            <a:ext cx="2818956" cy="3998570"/>
           </a:xfrm>
         </p:spPr>
         <p:txBody>
@@ -4413,14 +4395,14 @@
           <a:lstStyle/>
           <a:p>
             <a:r>
-              <a:rPr lang="hu-HU" dirty="0"/>
+              <a:rPr lang="hu-HU" b="1" dirty="0"/>
               <a:t>Keresés név alapján</a:t>
             </a:r>
           </a:p>
           <a:p>
             <a:r>
-              <a:rPr lang="hu-HU" dirty="0"/>
-              <a:t>Szűrés:</a:t>
+              <a:rPr lang="hu-HU" b="1" dirty="0"/>
+              <a:t>Szűrés</a:t>
             </a:r>
           </a:p>
           <a:p>
@@ -4455,8 +4437,8 @@
           </a:p>
           <a:p>
             <a:r>
-              <a:rPr lang="hu-HU" dirty="0"/>
-              <a:t>Rendezés: </a:t>
+              <a:rPr lang="hu-HU" b="1" dirty="0"/>
+              <a:t>Rendezés:</a:t>
             </a:r>
           </a:p>
           <a:p>
@@ -4601,7 +4583,7 @@
           <a:p>
             <a:r>
               <a:rPr lang="hu-HU" dirty="0"/>
-              <a:t>Funkciók – 3.</a:t>
+              <a:t>Funkciók – Hírek</a:t>
             </a:r>
           </a:p>
         </p:txBody>
@@ -4633,8 +4615,8 @@
           <a:lstStyle/>
           <a:p>
             <a:r>
-              <a:rPr lang="hu-HU" dirty="0"/>
-              <a:t>Hírek:</a:t>
+              <a:rPr lang="hu-HU" b="1" dirty="0"/>
+              <a:t>Hírek</a:t>
             </a:r>
           </a:p>
           <a:p>
@@ -4700,6 +4682,376 @@
     <p:extLst>
       <p:ext uri="{BB962C8B-B14F-4D97-AF65-F5344CB8AC3E}">
         <p14:creationId xmlns:p14="http://schemas.microsoft.com/office/powerpoint/2010/main" val="466209533"/>
+      </p:ext>
+    </p:extLst>
+  </p:cSld>
+  <p:clrMapOvr>
+    <a:masterClrMapping/>
+  </p:clrMapOvr>
+</p:sld>
+</file>
+
+<file path=ppt/slides/slide7.xml><?xml version="1.0" encoding="utf-8"?>
+<p:sld xmlns:a="http://schemas.openxmlformats.org/drawingml/2006/main" xmlns:r="http://schemas.openxmlformats.org/officeDocument/2006/relationships" xmlns:p="http://schemas.openxmlformats.org/presentationml/2006/main">
+  <p:cSld>
+    <p:spTree>
+      <p:nvGrpSpPr>
+        <p:cNvPr id="1" name=""/>
+        <p:cNvGrpSpPr/>
+        <p:nvPr/>
+      </p:nvGrpSpPr>
+      <p:grpSpPr>
+        <a:xfrm>
+          <a:off x="0" y="0"/>
+          <a:ext cx="0" cy="0"/>
+          <a:chOff x="0" y="0"/>
+          <a:chExt cx="0" cy="0"/>
+        </a:xfrm>
+      </p:grpSpPr>
+      <p:sp>
+        <p:nvSpPr>
+          <p:cNvPr id="2" name="Cím 1">
+            <a:extLst>
+              <a:ext uri="{FF2B5EF4-FFF2-40B4-BE49-F238E27FC236}">
+                <a16:creationId xmlns:a16="http://schemas.microsoft.com/office/drawing/2014/main" id="{56702B1D-55FA-49C5-83EB-8951F7573D72}"/>
+              </a:ext>
+            </a:extLst>
+          </p:cNvPr>
+          <p:cNvSpPr>
+            <a:spLocks noGrp="1"/>
+          </p:cNvSpPr>
+          <p:nvPr>
+            <p:ph type="title"/>
+          </p:nvPr>
+        </p:nvSpPr>
+        <p:spPr/>
+        <p:txBody>
+          <a:bodyPr/>
+          <a:lstStyle/>
+          <a:p>
+            <a:r>
+              <a:rPr lang="hu-HU" dirty="0"/>
+              <a:t>Funkciók – vélemény írás</a:t>
+            </a:r>
+          </a:p>
+        </p:txBody>
+      </p:sp>
+      <p:sp>
+        <p:nvSpPr>
+          <p:cNvPr id="3" name="Tartalom helye 2">
+            <a:extLst>
+              <a:ext uri="{FF2B5EF4-FFF2-40B4-BE49-F238E27FC236}">
+                <a16:creationId xmlns:a16="http://schemas.microsoft.com/office/drawing/2014/main" id="{911D8889-4C0D-4959-961F-783F84A040C0}"/>
+              </a:ext>
+            </a:extLst>
+          </p:cNvPr>
+          <p:cNvSpPr>
+            <a:spLocks noGrp="1"/>
+          </p:cNvSpPr>
+          <p:nvPr>
+            <p:ph idx="1"/>
+          </p:nvPr>
+        </p:nvSpPr>
+        <p:spPr>
+          <a:xfrm>
+            <a:off x="581192" y="2239392"/>
+            <a:ext cx="4754288" cy="2379215"/>
+          </a:xfrm>
+        </p:spPr>
+        <p:txBody>
+          <a:bodyPr>
+            <a:normAutofit/>
+          </a:bodyPr>
+          <a:lstStyle/>
+          <a:p>
+            <a:r>
+              <a:rPr lang="hu-HU" b="1" dirty="0"/>
+              <a:t>Vélemény</a:t>
+            </a:r>
+          </a:p>
+          <a:p>
+            <a:pPr marL="342900" indent="-342900">
+              <a:buFont typeface="+mj-lt"/>
+              <a:buAutoNum type="arabicPeriod"/>
+            </a:pPr>
+            <a:r>
+              <a:rPr lang="hu-HU" dirty="0"/>
+              <a:t>Bejelentkezés szükséges</a:t>
+            </a:r>
+          </a:p>
+          <a:p>
+            <a:pPr marL="342900" indent="-342900">
+              <a:buFont typeface="+mj-lt"/>
+              <a:buAutoNum type="arabicPeriod"/>
+            </a:pPr>
+            <a:r>
+              <a:rPr lang="hu-HU" dirty="0"/>
+              <a:t>Írhatunk véleményeket, amiket mindenki lát</a:t>
+            </a:r>
+          </a:p>
+          <a:p>
+            <a:pPr marL="342900" indent="-342900">
+              <a:buFont typeface="+mj-lt"/>
+              <a:buAutoNum type="arabicPeriod"/>
+            </a:pPr>
+            <a:endParaRPr lang="hu-HU" dirty="0"/>
+          </a:p>
+          <a:p>
+            <a:endParaRPr lang="hu-HU" dirty="0"/>
+          </a:p>
+          <a:p>
+            <a:endParaRPr lang="hu-HU" dirty="0"/>
+          </a:p>
+        </p:txBody>
+      </p:sp>
+      <p:pic>
+        <p:nvPicPr>
+          <p:cNvPr id="4" name="Kép 3">
+            <a:extLst>
+              <a:ext uri="{FF2B5EF4-FFF2-40B4-BE49-F238E27FC236}">
+                <a16:creationId xmlns:a16="http://schemas.microsoft.com/office/drawing/2014/main" id="{4654C1C5-E573-45F1-8CF1-D025A98FD77B}"/>
+              </a:ext>
+            </a:extLst>
+          </p:cNvPr>
+          <p:cNvPicPr>
+            <a:picLocks noChangeAspect="1"/>
+          </p:cNvPicPr>
+          <p:nvPr/>
+        </p:nvPicPr>
+        <p:blipFill>
+          <a:blip r:embed="rId2"/>
+          <a:stretch>
+            <a:fillRect/>
+          </a:stretch>
+        </p:blipFill>
+        <p:spPr>
+          <a:xfrm>
+            <a:off x="5621365" y="2239392"/>
+            <a:ext cx="5989443" cy="3429000"/>
+          </a:xfrm>
+          <a:prstGeom prst="rect">
+            <a:avLst/>
+          </a:prstGeom>
+        </p:spPr>
+      </p:pic>
+      <p:pic>
+        <p:nvPicPr>
+          <p:cNvPr id="5" name="Kép 4">
+            <a:extLst>
+              <a:ext uri="{FF2B5EF4-FFF2-40B4-BE49-F238E27FC236}">
+                <a16:creationId xmlns:a16="http://schemas.microsoft.com/office/drawing/2014/main" id="{8A9B7357-AEF6-49D4-9E7C-40F1A131BBF5}"/>
+              </a:ext>
+            </a:extLst>
+          </p:cNvPr>
+          <p:cNvPicPr>
+            <a:picLocks noChangeAspect="1"/>
+          </p:cNvPicPr>
+          <p:nvPr/>
+        </p:nvPicPr>
+        <p:blipFill>
+          <a:blip r:embed="rId3"/>
+          <a:stretch>
+            <a:fillRect/>
+          </a:stretch>
+        </p:blipFill>
+        <p:spPr>
+          <a:xfrm>
+            <a:off x="218197" y="4817395"/>
+            <a:ext cx="5291874" cy="1338449"/>
+          </a:xfrm>
+          <a:prstGeom prst="rect">
+            <a:avLst/>
+          </a:prstGeom>
+        </p:spPr>
+      </p:pic>
+    </p:spTree>
+    <p:extLst>
+      <p:ext uri="{BB962C8B-B14F-4D97-AF65-F5344CB8AC3E}">
+        <p14:creationId xmlns:p14="http://schemas.microsoft.com/office/powerpoint/2010/main" val="1509775672"/>
+      </p:ext>
+    </p:extLst>
+  </p:cSld>
+  <p:clrMapOvr>
+    <a:masterClrMapping/>
+  </p:clrMapOvr>
+</p:sld>
+</file>
+
+<file path=ppt/slides/slide8.xml><?xml version="1.0" encoding="utf-8"?>
+<p:sld xmlns:a="http://schemas.openxmlformats.org/drawingml/2006/main" xmlns:r="http://schemas.openxmlformats.org/officeDocument/2006/relationships" xmlns:p="http://schemas.openxmlformats.org/presentationml/2006/main">
+  <p:cSld>
+    <p:spTree>
+      <p:nvGrpSpPr>
+        <p:cNvPr id="1" name=""/>
+        <p:cNvGrpSpPr/>
+        <p:nvPr/>
+      </p:nvGrpSpPr>
+      <p:grpSpPr>
+        <a:xfrm>
+          <a:off x="0" y="0"/>
+          <a:ext cx="0" cy="0"/>
+          <a:chOff x="0" y="0"/>
+          <a:chExt cx="0" cy="0"/>
+        </a:xfrm>
+      </p:grpSpPr>
+      <p:sp>
+        <p:nvSpPr>
+          <p:cNvPr id="2" name="Cím 1">
+            <a:extLst>
+              <a:ext uri="{FF2B5EF4-FFF2-40B4-BE49-F238E27FC236}">
+                <a16:creationId xmlns:a16="http://schemas.microsoft.com/office/drawing/2014/main" id="{378E8DE0-0679-4D0F-9ADB-CAB48EA08C77}"/>
+              </a:ext>
+            </a:extLst>
+          </p:cNvPr>
+          <p:cNvSpPr>
+            <a:spLocks noGrp="1"/>
+          </p:cNvSpPr>
+          <p:nvPr>
+            <p:ph type="title"/>
+          </p:nvPr>
+        </p:nvSpPr>
+        <p:spPr/>
+        <p:txBody>
+          <a:bodyPr/>
+          <a:lstStyle/>
+          <a:p>
+            <a:r>
+              <a:rPr lang="hu-HU" dirty="0"/>
+              <a:t>Funkciók – Kedvencek</a:t>
+            </a:r>
+          </a:p>
+        </p:txBody>
+      </p:sp>
+      <p:sp>
+        <p:nvSpPr>
+          <p:cNvPr id="3" name="Tartalom helye 2">
+            <a:extLst>
+              <a:ext uri="{FF2B5EF4-FFF2-40B4-BE49-F238E27FC236}">
+                <a16:creationId xmlns:a16="http://schemas.microsoft.com/office/drawing/2014/main" id="{F6F9B1CC-8250-43E8-8916-56D287E675B2}"/>
+              </a:ext>
+            </a:extLst>
+          </p:cNvPr>
+          <p:cNvSpPr>
+            <a:spLocks noGrp="1"/>
+          </p:cNvSpPr>
+          <p:nvPr>
+            <p:ph idx="1"/>
+          </p:nvPr>
+        </p:nvSpPr>
+        <p:spPr>
+          <a:xfrm>
+            <a:off x="3688814" y="1835460"/>
+            <a:ext cx="4532346" cy="2230513"/>
+          </a:xfrm>
+        </p:spPr>
+        <p:txBody>
+          <a:bodyPr/>
+          <a:lstStyle/>
+          <a:p>
+            <a:r>
+              <a:rPr lang="hu-HU" b="1" dirty="0"/>
+              <a:t>Kedvencek</a:t>
+            </a:r>
+          </a:p>
+          <a:p>
+            <a:pPr marL="342900" indent="-342900">
+              <a:buFont typeface="+mj-lt"/>
+              <a:buAutoNum type="arabicPeriod"/>
+            </a:pPr>
+            <a:r>
+              <a:rPr lang="hu-HU" dirty="0"/>
+              <a:t>Lehetőségünk van a parfümöket elmenteni.</a:t>
+            </a:r>
+          </a:p>
+          <a:p>
+            <a:pPr marL="342900" indent="-342900">
+              <a:buFont typeface="+mj-lt"/>
+              <a:buAutoNum type="arabicPeriod"/>
+            </a:pPr>
+            <a:r>
+              <a:rPr lang="hu-HU" dirty="0"/>
+              <a:t>Bejelentkezés szükséges</a:t>
+            </a:r>
+          </a:p>
+          <a:p>
+            <a:pPr marL="342900" indent="-342900">
+              <a:buFont typeface="+mj-lt"/>
+              <a:buAutoNum type="arabicPeriod"/>
+            </a:pPr>
+            <a:r>
+              <a:rPr lang="hu-HU" dirty="0"/>
+              <a:t>Bejelentkezés után megjelenik egy kedvencek fül</a:t>
+            </a:r>
+          </a:p>
+          <a:p>
+            <a:endParaRPr lang="hu-HU" dirty="0"/>
+          </a:p>
+        </p:txBody>
+      </p:sp>
+      <p:pic>
+        <p:nvPicPr>
+          <p:cNvPr id="4" name="Kép 3">
+            <a:extLst>
+              <a:ext uri="{FF2B5EF4-FFF2-40B4-BE49-F238E27FC236}">
+                <a16:creationId xmlns:a16="http://schemas.microsoft.com/office/drawing/2014/main" id="{D4A84EEE-DD72-4835-A7A7-F22E32912CB2}"/>
+              </a:ext>
+            </a:extLst>
+          </p:cNvPr>
+          <p:cNvPicPr>
+            <a:picLocks noChangeAspect="1"/>
+          </p:cNvPicPr>
+          <p:nvPr/>
+        </p:nvPicPr>
+        <p:blipFill>
+          <a:blip r:embed="rId2"/>
+          <a:stretch>
+            <a:fillRect/>
+          </a:stretch>
+        </p:blipFill>
+        <p:spPr>
+          <a:xfrm>
+            <a:off x="6096000" y="3999046"/>
+            <a:ext cx="5655821" cy="2820690"/>
+          </a:xfrm>
+          <a:prstGeom prst="rect">
+            <a:avLst/>
+          </a:prstGeom>
+        </p:spPr>
+      </p:pic>
+      <p:pic>
+        <p:nvPicPr>
+          <p:cNvPr id="6" name="Kép 5">
+            <a:extLst>
+              <a:ext uri="{FF2B5EF4-FFF2-40B4-BE49-F238E27FC236}">
+                <a16:creationId xmlns:a16="http://schemas.microsoft.com/office/drawing/2014/main" id="{F1ED3079-26E7-467D-A3BC-D408D7D8D857}"/>
+              </a:ext>
+            </a:extLst>
+          </p:cNvPr>
+          <p:cNvPicPr>
+            <a:picLocks noChangeAspect="1"/>
+          </p:cNvPicPr>
+          <p:nvPr/>
+        </p:nvPicPr>
+        <p:blipFill>
+          <a:blip r:embed="rId3"/>
+          <a:stretch>
+            <a:fillRect/>
+          </a:stretch>
+        </p:blipFill>
+        <p:spPr>
+          <a:xfrm>
+            <a:off x="160711" y="3999046"/>
+            <a:ext cx="5655821" cy="2820690"/>
+          </a:xfrm>
+          <a:prstGeom prst="rect">
+            <a:avLst/>
+          </a:prstGeom>
+        </p:spPr>
+      </p:pic>
+    </p:spTree>
+    <p:extLst>
+      <p:ext uri="{BB962C8B-B14F-4D97-AF65-F5344CB8AC3E}">
+        <p14:creationId xmlns:p14="http://schemas.microsoft.com/office/powerpoint/2010/main" val="4210194865"/>
       </p:ext>
     </p:extLst>
   </p:cSld>

--- a/Parfümvilág.pptx
+++ b/Parfümvilág.pptx
@@ -13,6 +13,13 @@
     <p:sldId id="261" r:id="rId7"/>
     <p:sldId id="262" r:id="rId8"/>
     <p:sldId id="263" r:id="rId9"/>
+    <p:sldId id="264" r:id="rId10"/>
+    <p:sldId id="265" r:id="rId11"/>
+    <p:sldId id="266" r:id="rId12"/>
+    <p:sldId id="267" r:id="rId13"/>
+    <p:sldId id="268" r:id="rId14"/>
+    <p:sldId id="269" r:id="rId15"/>
+    <p:sldId id="270" r:id="rId16"/>
   </p:sldIdLst>
   <p:sldSz cx="12192000" cy="6858000"/>
   <p:notesSz cx="6858000" cy="9144000"/>
@@ -365,7 +372,7 @@
             <a:fld id="{B61BEF0D-F0BB-DE4B-95CE-6DB70DBA9567}" type="datetimeFigureOut">
               <a:rPr lang="en-US" dirty="0"/>
               <a:pPr/>
-              <a:t>4/1/2025</a:t>
+              <a:t>4/7/2025</a:t>
             </a:fld>
             <a:endParaRPr lang="en-US" dirty="0"/>
           </a:p>
@@ -624,7 +631,7 @@
             <a:fld id="{B61BEF0D-F0BB-DE4B-95CE-6DB70DBA9567}" type="datetimeFigureOut">
               <a:rPr lang="en-US" dirty="0"/>
               <a:pPr/>
-              <a:t>4/1/2025</a:t>
+              <a:t>4/7/2025</a:t>
             </a:fld>
             <a:endParaRPr lang="en-US" dirty="0"/>
           </a:p>
@@ -856,7 +863,7 @@
             <a:fld id="{B61BEF0D-F0BB-DE4B-95CE-6DB70DBA9567}" type="datetimeFigureOut">
               <a:rPr lang="en-US" dirty="0"/>
               <a:pPr/>
-              <a:t>4/1/2025</a:t>
+              <a:t>4/7/2025</a:t>
             </a:fld>
             <a:endParaRPr lang="en-US" dirty="0"/>
           </a:p>
@@ -1093,7 +1100,7 @@
             <a:fld id="{B61BEF0D-F0BB-DE4B-95CE-6DB70DBA9567}" type="datetimeFigureOut">
               <a:rPr lang="en-US" dirty="0"/>
               <a:pPr/>
-              <a:t>4/1/2025</a:t>
+              <a:t>4/7/2025</a:t>
             </a:fld>
             <a:endParaRPr lang="en-US" dirty="0"/>
           </a:p>
@@ -1397,7 +1404,7 @@
             <a:fld id="{B61BEF0D-F0BB-DE4B-95CE-6DB70DBA9567}" type="datetimeFigureOut">
               <a:rPr lang="en-US" dirty="0"/>
               <a:pPr/>
-              <a:t>4/1/2025</a:t>
+              <a:t>4/7/2025</a:t>
             </a:fld>
             <a:endParaRPr lang="en-US" dirty="0"/>
           </a:p>
@@ -1696,7 +1703,7 @@
             <a:fld id="{B61BEF0D-F0BB-DE4B-95CE-6DB70DBA9567}" type="datetimeFigureOut">
               <a:rPr lang="en-US" dirty="0"/>
               <a:pPr/>
-              <a:t>4/1/2025</a:t>
+              <a:t>4/7/2025</a:t>
             </a:fld>
             <a:endParaRPr lang="en-US" dirty="0"/>
           </a:p>
@@ -2115,7 +2122,7 @@
             <a:fld id="{B61BEF0D-F0BB-DE4B-95CE-6DB70DBA9567}" type="datetimeFigureOut">
               <a:rPr lang="en-US" dirty="0"/>
               <a:pPr/>
-              <a:t>4/1/2025</a:t>
+              <a:t>4/7/2025</a:t>
             </a:fld>
             <a:endParaRPr lang="en-US" dirty="0"/>
           </a:p>
@@ -2274,7 +2281,7 @@
             <a:fld id="{B61BEF0D-F0BB-DE4B-95CE-6DB70DBA9567}" type="datetimeFigureOut">
               <a:rPr lang="en-US" dirty="0"/>
               <a:pPr/>
-              <a:t>4/1/2025</a:t>
+              <a:t>4/7/2025</a:t>
             </a:fld>
             <a:endParaRPr lang="en-US" dirty="0"/>
           </a:p>
@@ -2366,7 +2373,7 @@
             <a:fld id="{B61BEF0D-F0BB-DE4B-95CE-6DB70DBA9567}" type="datetimeFigureOut">
               <a:rPr lang="en-US" dirty="0"/>
               <a:pPr/>
-              <a:t>4/1/2025</a:t>
+              <a:t>4/7/2025</a:t>
             </a:fld>
             <a:endParaRPr lang="en-US" dirty="0"/>
           </a:p>
@@ -2741,7 +2748,7 @@
             <a:fld id="{B61BEF0D-F0BB-DE4B-95CE-6DB70DBA9567}" type="datetimeFigureOut">
               <a:rPr lang="en-US" dirty="0"/>
               <a:pPr/>
-              <a:t>4/1/2025</a:t>
+              <a:t>4/7/2025</a:t>
             </a:fld>
             <a:endParaRPr lang="en-US" dirty="0"/>
           </a:p>
@@ -3027,7 +3034,7 @@
             <a:fld id="{B61BEF0D-F0BB-DE4B-95CE-6DB70DBA9567}" type="datetimeFigureOut">
               <a:rPr lang="en-US" dirty="0"/>
               <a:pPr/>
-              <a:t>4/1/2025</a:t>
+              <a:t>4/7/2025</a:t>
             </a:fld>
             <a:endParaRPr lang="en-US" dirty="0"/>
           </a:p>
@@ -3235,7 +3242,7 @@
             <a:fld id="{B61BEF0D-F0BB-DE4B-95CE-6DB70DBA9567}" type="datetimeFigureOut">
               <a:rPr lang="en-US" dirty="0"/>
               <a:pPr/>
-              <a:t>4/1/2025</a:t>
+              <a:t>4/7/2025</a:t>
             </a:fld>
             <a:endParaRPr lang="en-US" dirty="0"/>
           </a:p>
@@ -3906,6 +3913,2152 @@
 </p:sld>
 </file>
 
+<file path=ppt/slides/slide10.xml><?xml version="1.0" encoding="utf-8"?>
+<p:sld xmlns:a="http://schemas.openxmlformats.org/drawingml/2006/main" xmlns:r="http://schemas.openxmlformats.org/officeDocument/2006/relationships" xmlns:p="http://schemas.openxmlformats.org/presentationml/2006/main">
+  <p:cSld>
+    <p:spTree>
+      <p:nvGrpSpPr>
+        <p:cNvPr id="1" name=""/>
+        <p:cNvGrpSpPr/>
+        <p:nvPr/>
+      </p:nvGrpSpPr>
+      <p:grpSpPr>
+        <a:xfrm>
+          <a:off x="0" y="0"/>
+          <a:ext cx="0" cy="0"/>
+          <a:chOff x="0" y="0"/>
+          <a:chExt cx="0" cy="0"/>
+        </a:xfrm>
+      </p:grpSpPr>
+      <p:sp>
+        <p:nvSpPr>
+          <p:cNvPr id="2" name="Cím 1">
+            <a:extLst>
+              <a:ext uri="{FF2B5EF4-FFF2-40B4-BE49-F238E27FC236}">
+                <a16:creationId xmlns:a16="http://schemas.microsoft.com/office/drawing/2014/main" id="{AB8DC071-ED00-44FE-ACDD-7C740E5C0E49}"/>
+              </a:ext>
+            </a:extLst>
+          </p:cNvPr>
+          <p:cNvSpPr>
+            <a:spLocks noGrp="1"/>
+          </p:cNvSpPr>
+          <p:nvPr>
+            <p:ph type="title"/>
+          </p:nvPr>
+        </p:nvSpPr>
+        <p:spPr/>
+        <p:txBody>
+          <a:bodyPr/>
+          <a:lstStyle/>
+          <a:p>
+            <a:r>
+              <a:rPr lang="hu-HU" dirty="0"/>
+              <a:t>Frontend</a:t>
+            </a:r>
+          </a:p>
+        </p:txBody>
+      </p:sp>
+      <p:sp>
+        <p:nvSpPr>
+          <p:cNvPr id="3" name="Tartalom helye 2">
+            <a:extLst>
+              <a:ext uri="{FF2B5EF4-FFF2-40B4-BE49-F238E27FC236}">
+                <a16:creationId xmlns:a16="http://schemas.microsoft.com/office/drawing/2014/main" id="{9D71AFA1-A0EA-486B-811B-21CF641CB35C}"/>
+              </a:ext>
+            </a:extLst>
+          </p:cNvPr>
+          <p:cNvSpPr>
+            <a:spLocks noGrp="1"/>
+          </p:cNvSpPr>
+          <p:nvPr>
+            <p:ph idx="1"/>
+          </p:nvPr>
+        </p:nvSpPr>
+        <p:spPr>
+          <a:xfrm>
+            <a:off x="581192" y="2180496"/>
+            <a:ext cx="4123973" cy="3678303"/>
+          </a:xfrm>
+        </p:spPr>
+        <p:txBody>
+          <a:bodyPr/>
+          <a:lstStyle/>
+          <a:p>
+            <a:pPr marL="285750" indent="-285750">
+              <a:buFont typeface="Arial" panose="020B0604020202020204" pitchFamily="34" charset="0"/>
+              <a:buChar char="•"/>
+            </a:pPr>
+            <a:r>
+              <a:rPr lang="hu-HU" dirty="0" err="1"/>
+              <a:t>React</a:t>
+            </a:r>
+            <a:endParaRPr lang="hu-HU" dirty="0"/>
+          </a:p>
+          <a:p>
+            <a:pPr marL="285750" indent="-285750">
+              <a:buFont typeface="Arial" panose="020B0604020202020204" pitchFamily="34" charset="0"/>
+              <a:buChar char="•"/>
+            </a:pPr>
+            <a:r>
+              <a:rPr lang="hu-HU" dirty="0"/>
+              <a:t>CSS</a:t>
+            </a:r>
+          </a:p>
+          <a:p>
+            <a:pPr marL="285750" indent="-285750">
+              <a:buFont typeface="Arial" panose="020B0604020202020204" pitchFamily="34" charset="0"/>
+              <a:buChar char="•"/>
+            </a:pPr>
+            <a:r>
+              <a:rPr lang="hu-HU" dirty="0" err="1"/>
+              <a:t>Bootstrap</a:t>
+            </a:r>
+            <a:endParaRPr lang="hu-HU" dirty="0"/>
+          </a:p>
+          <a:p>
+            <a:pPr marL="285750" indent="-285750">
+              <a:buFont typeface="Arial" panose="020B0604020202020204" pitchFamily="34" charset="0"/>
+              <a:buChar char="•"/>
+            </a:pPr>
+            <a:r>
+              <a:rPr lang="hu-HU" dirty="0"/>
+              <a:t>JS</a:t>
+            </a:r>
+          </a:p>
+          <a:p>
+            <a:endParaRPr lang="hu-HU" dirty="0"/>
+          </a:p>
+        </p:txBody>
+      </p:sp>
+      <p:pic>
+        <p:nvPicPr>
+          <p:cNvPr id="5" name="Kép 4">
+            <a:extLst>
+              <a:ext uri="{FF2B5EF4-FFF2-40B4-BE49-F238E27FC236}">
+                <a16:creationId xmlns:a16="http://schemas.microsoft.com/office/drawing/2014/main" id="{47EB17AE-5C7E-4F0D-85DA-17F6A9B8DFB9}"/>
+              </a:ext>
+            </a:extLst>
+          </p:cNvPr>
+          <p:cNvPicPr>
+            <a:picLocks noChangeAspect="1"/>
+          </p:cNvPicPr>
+          <p:nvPr/>
+        </p:nvPicPr>
+        <p:blipFill>
+          <a:blip r:embed="rId2"/>
+          <a:stretch>
+            <a:fillRect/>
+          </a:stretch>
+        </p:blipFill>
+        <p:spPr>
+          <a:xfrm>
+            <a:off x="2074310" y="2354532"/>
+            <a:ext cx="2842506" cy="3330229"/>
+          </a:xfrm>
+          <a:prstGeom prst="rect">
+            <a:avLst/>
+          </a:prstGeom>
+        </p:spPr>
+      </p:pic>
+      <p:pic>
+        <p:nvPicPr>
+          <p:cNvPr id="6" name="Kép 5">
+            <a:extLst>
+              <a:ext uri="{FF2B5EF4-FFF2-40B4-BE49-F238E27FC236}">
+                <a16:creationId xmlns:a16="http://schemas.microsoft.com/office/drawing/2014/main" id="{2F1E0744-B84D-4874-824D-FD63C5274EA8}"/>
+              </a:ext>
+            </a:extLst>
+          </p:cNvPr>
+          <p:cNvPicPr>
+            <a:picLocks noChangeAspect="1"/>
+          </p:cNvPicPr>
+          <p:nvPr/>
+        </p:nvPicPr>
+        <p:blipFill>
+          <a:blip r:embed="rId3"/>
+          <a:stretch>
+            <a:fillRect/>
+          </a:stretch>
+        </p:blipFill>
+        <p:spPr>
+          <a:xfrm>
+            <a:off x="5225070" y="1765531"/>
+            <a:ext cx="3553321" cy="1848108"/>
+          </a:xfrm>
+          <a:prstGeom prst="rect">
+            <a:avLst/>
+          </a:prstGeom>
+        </p:spPr>
+      </p:pic>
+      <p:pic>
+        <p:nvPicPr>
+          <p:cNvPr id="7" name="Kép 6">
+            <a:extLst>
+              <a:ext uri="{FF2B5EF4-FFF2-40B4-BE49-F238E27FC236}">
+                <a16:creationId xmlns:a16="http://schemas.microsoft.com/office/drawing/2014/main" id="{273E6E34-1AE2-4E5B-8154-9CCA81C0FE09}"/>
+              </a:ext>
+            </a:extLst>
+          </p:cNvPr>
+          <p:cNvPicPr>
+            <a:picLocks noChangeAspect="1"/>
+          </p:cNvPicPr>
+          <p:nvPr/>
+        </p:nvPicPr>
+        <p:blipFill>
+          <a:blip r:embed="rId4"/>
+          <a:stretch>
+            <a:fillRect/>
+          </a:stretch>
+        </p:blipFill>
+        <p:spPr>
+          <a:xfrm>
+            <a:off x="5225070" y="3845909"/>
+            <a:ext cx="3429912" cy="2709720"/>
+          </a:xfrm>
+          <a:prstGeom prst="rect">
+            <a:avLst/>
+          </a:prstGeom>
+        </p:spPr>
+      </p:pic>
+      <p:pic>
+        <p:nvPicPr>
+          <p:cNvPr id="8" name="Kép 7">
+            <a:extLst>
+              <a:ext uri="{FF2B5EF4-FFF2-40B4-BE49-F238E27FC236}">
+                <a16:creationId xmlns:a16="http://schemas.microsoft.com/office/drawing/2014/main" id="{6BA58AA6-D902-4659-9EDD-EAF05CD1DB54}"/>
+              </a:ext>
+            </a:extLst>
+          </p:cNvPr>
+          <p:cNvPicPr>
+            <a:picLocks noChangeAspect="1"/>
+          </p:cNvPicPr>
+          <p:nvPr/>
+        </p:nvPicPr>
+        <p:blipFill>
+          <a:blip r:embed="rId5"/>
+          <a:stretch>
+            <a:fillRect/>
+          </a:stretch>
+        </p:blipFill>
+        <p:spPr>
+          <a:xfrm>
+            <a:off x="8963236" y="3089491"/>
+            <a:ext cx="3043303" cy="2228560"/>
+          </a:xfrm>
+          <a:prstGeom prst="rect">
+            <a:avLst/>
+          </a:prstGeom>
+        </p:spPr>
+      </p:pic>
+    </p:spTree>
+    <p:extLst>
+      <p:ext uri="{BB962C8B-B14F-4D97-AF65-F5344CB8AC3E}">
+        <p14:creationId xmlns:p14="http://schemas.microsoft.com/office/powerpoint/2010/main" val="1651245338"/>
+      </p:ext>
+    </p:extLst>
+  </p:cSld>
+  <p:clrMapOvr>
+    <a:masterClrMapping/>
+  </p:clrMapOvr>
+</p:sld>
+</file>
+
+<file path=ppt/slides/slide11.xml><?xml version="1.0" encoding="utf-8"?>
+<p:sld xmlns:a="http://schemas.openxmlformats.org/drawingml/2006/main" xmlns:r="http://schemas.openxmlformats.org/officeDocument/2006/relationships" xmlns:p="http://schemas.openxmlformats.org/presentationml/2006/main">
+  <p:cSld>
+    <p:spTree>
+      <p:nvGrpSpPr>
+        <p:cNvPr id="1" name=""/>
+        <p:cNvGrpSpPr/>
+        <p:nvPr/>
+      </p:nvGrpSpPr>
+      <p:grpSpPr>
+        <a:xfrm>
+          <a:off x="0" y="0"/>
+          <a:ext cx="0" cy="0"/>
+          <a:chOff x="0" y="0"/>
+          <a:chExt cx="0" cy="0"/>
+        </a:xfrm>
+      </p:grpSpPr>
+      <p:sp>
+        <p:nvSpPr>
+          <p:cNvPr id="2" name="Cím 1">
+            <a:extLst>
+              <a:ext uri="{FF2B5EF4-FFF2-40B4-BE49-F238E27FC236}">
+                <a16:creationId xmlns:a16="http://schemas.microsoft.com/office/drawing/2014/main" id="{CE5DBCBF-3B61-4BC9-A645-A413224FAD2B}"/>
+              </a:ext>
+            </a:extLst>
+          </p:cNvPr>
+          <p:cNvSpPr>
+            <a:spLocks noGrp="1"/>
+          </p:cNvSpPr>
+          <p:nvPr>
+            <p:ph type="title"/>
+          </p:nvPr>
+        </p:nvSpPr>
+        <p:spPr/>
+        <p:txBody>
+          <a:bodyPr/>
+          <a:lstStyle/>
+          <a:p>
+            <a:r>
+              <a:rPr lang="hu-HU" dirty="0"/>
+              <a:t>backend</a:t>
+            </a:r>
+          </a:p>
+        </p:txBody>
+      </p:sp>
+      <p:sp>
+        <p:nvSpPr>
+          <p:cNvPr id="3" name="Tartalom helye 2">
+            <a:extLst>
+              <a:ext uri="{FF2B5EF4-FFF2-40B4-BE49-F238E27FC236}">
+                <a16:creationId xmlns:a16="http://schemas.microsoft.com/office/drawing/2014/main" id="{7F06E9D6-5050-4864-928D-AE11C45FF1F8}"/>
+              </a:ext>
+            </a:extLst>
+          </p:cNvPr>
+          <p:cNvSpPr>
+            <a:spLocks noGrp="1"/>
+          </p:cNvSpPr>
+          <p:nvPr>
+            <p:ph idx="1"/>
+          </p:nvPr>
+        </p:nvSpPr>
+        <p:spPr>
+          <a:xfrm>
+            <a:off x="581192" y="2277528"/>
+            <a:ext cx="11029615" cy="3678303"/>
+          </a:xfrm>
+        </p:spPr>
+        <p:txBody>
+          <a:bodyPr/>
+          <a:lstStyle/>
+          <a:p>
+            <a:pPr marL="285750" indent="-285750">
+              <a:buFont typeface="Arial" panose="020B0604020202020204" pitchFamily="34" charset="0"/>
+              <a:buChar char="•"/>
+            </a:pPr>
+            <a:r>
+              <a:rPr lang="hu-HU" dirty="0"/>
+              <a:t>Node.js</a:t>
+            </a:r>
+          </a:p>
+          <a:p>
+            <a:pPr marL="285750" indent="-285750">
+              <a:buFont typeface="Arial" panose="020B0604020202020204" pitchFamily="34" charset="0"/>
+              <a:buChar char="•"/>
+            </a:pPr>
+            <a:r>
+              <a:rPr lang="hu-HU" dirty="0"/>
+              <a:t>Express.js</a:t>
+            </a:r>
+          </a:p>
+          <a:p>
+            <a:endParaRPr lang="hu-HU" dirty="0"/>
+          </a:p>
+        </p:txBody>
+      </p:sp>
+      <p:pic>
+        <p:nvPicPr>
+          <p:cNvPr id="4" name="Kép 3">
+            <a:extLst>
+              <a:ext uri="{FF2B5EF4-FFF2-40B4-BE49-F238E27FC236}">
+                <a16:creationId xmlns:a16="http://schemas.microsoft.com/office/drawing/2014/main" id="{6A0FF9F9-C77F-4E4F-992A-0FDFEE9E8629}"/>
+              </a:ext>
+            </a:extLst>
+          </p:cNvPr>
+          <p:cNvPicPr>
+            <a:picLocks noChangeAspect="1"/>
+          </p:cNvPicPr>
+          <p:nvPr/>
+        </p:nvPicPr>
+        <p:blipFill>
+          <a:blip r:embed="rId2"/>
+          <a:stretch>
+            <a:fillRect/>
+          </a:stretch>
+        </p:blipFill>
+        <p:spPr>
+          <a:xfrm>
+            <a:off x="2249741" y="2876334"/>
+            <a:ext cx="3460982" cy="3015868"/>
+          </a:xfrm>
+          <a:prstGeom prst="rect">
+            <a:avLst/>
+          </a:prstGeom>
+        </p:spPr>
+      </p:pic>
+      <p:pic>
+        <p:nvPicPr>
+          <p:cNvPr id="5" name="Kép 4">
+            <a:extLst>
+              <a:ext uri="{FF2B5EF4-FFF2-40B4-BE49-F238E27FC236}">
+                <a16:creationId xmlns:a16="http://schemas.microsoft.com/office/drawing/2014/main" id="{8A9A6F83-4118-461E-A177-CD9369A889C5}"/>
+              </a:ext>
+            </a:extLst>
+          </p:cNvPr>
+          <p:cNvPicPr>
+            <a:picLocks noChangeAspect="1"/>
+          </p:cNvPicPr>
+          <p:nvPr/>
+        </p:nvPicPr>
+        <p:blipFill>
+          <a:blip r:embed="rId3"/>
+          <a:stretch>
+            <a:fillRect/>
+          </a:stretch>
+        </p:blipFill>
+        <p:spPr>
+          <a:xfrm>
+            <a:off x="8697975" y="3429000"/>
+            <a:ext cx="2532277" cy="1911152"/>
+          </a:xfrm>
+          <a:prstGeom prst="rect">
+            <a:avLst/>
+          </a:prstGeom>
+        </p:spPr>
+      </p:pic>
+      <p:pic>
+        <p:nvPicPr>
+          <p:cNvPr id="6" name="Kép 5">
+            <a:extLst>
+              <a:ext uri="{FF2B5EF4-FFF2-40B4-BE49-F238E27FC236}">
+                <a16:creationId xmlns:a16="http://schemas.microsoft.com/office/drawing/2014/main" id="{820246E8-97BF-4C39-8CBE-1E153C5E60BE}"/>
+              </a:ext>
+            </a:extLst>
+          </p:cNvPr>
+          <p:cNvPicPr>
+            <a:picLocks noChangeAspect="1"/>
+          </p:cNvPicPr>
+          <p:nvPr/>
+        </p:nvPicPr>
+        <p:blipFill>
+          <a:blip r:embed="rId4"/>
+          <a:stretch>
+            <a:fillRect/>
+          </a:stretch>
+        </p:blipFill>
+        <p:spPr>
+          <a:xfrm>
+            <a:off x="5974532" y="2435659"/>
+            <a:ext cx="2613988" cy="1948609"/>
+          </a:xfrm>
+          <a:prstGeom prst="rect">
+            <a:avLst/>
+          </a:prstGeom>
+        </p:spPr>
+      </p:pic>
+      <p:pic>
+        <p:nvPicPr>
+          <p:cNvPr id="7" name="Kép 6">
+            <a:extLst>
+              <a:ext uri="{FF2B5EF4-FFF2-40B4-BE49-F238E27FC236}">
+                <a16:creationId xmlns:a16="http://schemas.microsoft.com/office/drawing/2014/main" id="{00AC7CFB-A0C2-48EF-AEAF-5306FFFD61FD}"/>
+              </a:ext>
+            </a:extLst>
+          </p:cNvPr>
+          <p:cNvPicPr>
+            <a:picLocks noChangeAspect="1"/>
+          </p:cNvPicPr>
+          <p:nvPr/>
+        </p:nvPicPr>
+        <p:blipFill>
+          <a:blip r:embed="rId5"/>
+          <a:stretch>
+            <a:fillRect/>
+          </a:stretch>
+        </p:blipFill>
+        <p:spPr>
+          <a:xfrm>
+            <a:off x="5974532" y="4580472"/>
+            <a:ext cx="2613988" cy="2009640"/>
+          </a:xfrm>
+          <a:prstGeom prst="rect">
+            <a:avLst/>
+          </a:prstGeom>
+        </p:spPr>
+      </p:pic>
+    </p:spTree>
+    <p:extLst>
+      <p:ext uri="{BB962C8B-B14F-4D97-AF65-F5344CB8AC3E}">
+        <p14:creationId xmlns:p14="http://schemas.microsoft.com/office/powerpoint/2010/main" val="4060179598"/>
+      </p:ext>
+    </p:extLst>
+  </p:cSld>
+  <p:clrMapOvr>
+    <a:masterClrMapping/>
+  </p:clrMapOvr>
+</p:sld>
+</file>
+
+<file path=ppt/slides/slide12.xml><?xml version="1.0" encoding="utf-8"?>
+<p:sld xmlns:a="http://schemas.openxmlformats.org/drawingml/2006/main" xmlns:r="http://schemas.openxmlformats.org/officeDocument/2006/relationships" xmlns:p="http://schemas.openxmlformats.org/presentationml/2006/main">
+  <p:cSld>
+    <p:spTree>
+      <p:nvGrpSpPr>
+        <p:cNvPr id="1" name=""/>
+        <p:cNvGrpSpPr/>
+        <p:nvPr/>
+      </p:nvGrpSpPr>
+      <p:grpSpPr>
+        <a:xfrm>
+          <a:off x="0" y="0"/>
+          <a:ext cx="0" cy="0"/>
+          <a:chOff x="0" y="0"/>
+          <a:chExt cx="0" cy="0"/>
+        </a:xfrm>
+      </p:grpSpPr>
+      <p:sp>
+        <p:nvSpPr>
+          <p:cNvPr id="2" name="Cím 1">
+            <a:extLst>
+              <a:ext uri="{FF2B5EF4-FFF2-40B4-BE49-F238E27FC236}">
+                <a16:creationId xmlns:a16="http://schemas.microsoft.com/office/drawing/2014/main" id="{1843F068-69E4-4DD0-93CB-5BC666639D11}"/>
+              </a:ext>
+            </a:extLst>
+          </p:cNvPr>
+          <p:cNvSpPr>
+            <a:spLocks noGrp="1"/>
+          </p:cNvSpPr>
+          <p:nvPr>
+            <p:ph type="title"/>
+          </p:nvPr>
+        </p:nvSpPr>
+        <p:spPr/>
+        <p:txBody>
+          <a:bodyPr/>
+          <a:lstStyle/>
+          <a:p>
+            <a:r>
+              <a:rPr lang="hu-HU" dirty="0" err="1"/>
+              <a:t>Database</a:t>
+            </a:r>
+            <a:endParaRPr lang="hu-HU" dirty="0"/>
+          </a:p>
+        </p:txBody>
+      </p:sp>
+      <p:sp>
+        <p:nvSpPr>
+          <p:cNvPr id="3" name="Tartalom helye 2">
+            <a:extLst>
+              <a:ext uri="{FF2B5EF4-FFF2-40B4-BE49-F238E27FC236}">
+                <a16:creationId xmlns:a16="http://schemas.microsoft.com/office/drawing/2014/main" id="{0673F9CA-835D-45E5-A308-19910663DFE0}"/>
+              </a:ext>
+            </a:extLst>
+          </p:cNvPr>
+          <p:cNvSpPr>
+            <a:spLocks noGrp="1"/>
+          </p:cNvSpPr>
+          <p:nvPr>
+            <p:ph idx="1"/>
+          </p:nvPr>
+        </p:nvSpPr>
+        <p:spPr>
+          <a:xfrm>
+            <a:off x="581193" y="2180496"/>
+            <a:ext cx="2481604" cy="3975348"/>
+          </a:xfrm>
+        </p:spPr>
+        <p:txBody>
+          <a:bodyPr/>
+          <a:lstStyle/>
+          <a:p>
+            <a:r>
+              <a:rPr lang="hu-HU" dirty="0" err="1"/>
+              <a:t>phpMyAdmin</a:t>
+            </a:r>
+            <a:endParaRPr lang="hu-HU" dirty="0"/>
+          </a:p>
+        </p:txBody>
+      </p:sp>
+      <p:pic>
+        <p:nvPicPr>
+          <p:cNvPr id="2052" name="Picture 4">
+            <a:extLst>
+              <a:ext uri="{FF2B5EF4-FFF2-40B4-BE49-F238E27FC236}">
+                <a16:creationId xmlns:a16="http://schemas.microsoft.com/office/drawing/2014/main" id="{C9E738C8-FD2B-480C-AB0B-EABA336DD6C9}"/>
+              </a:ext>
+            </a:extLst>
+          </p:cNvPr>
+          <p:cNvPicPr>
+            <a:picLocks noChangeAspect="1" noChangeArrowheads="1"/>
+          </p:cNvPicPr>
+          <p:nvPr/>
+        </p:nvPicPr>
+        <p:blipFill>
+          <a:blip r:embed="rId2">
+            <a:extLst>
+              <a:ext uri="{28A0092B-C50C-407E-A947-70E740481C1C}">
+                <a14:useLocalDpi xmlns:a14="http://schemas.microsoft.com/office/drawing/2010/main" val="0"/>
+              </a:ext>
+            </a:extLst>
+          </a:blip>
+          <a:srcRect/>
+          <a:stretch>
+            <a:fillRect/>
+          </a:stretch>
+        </p:blipFill>
+        <p:spPr bwMode="auto">
+          <a:xfrm>
+            <a:off x="3062797" y="2180496"/>
+            <a:ext cx="8490012" cy="4450623"/>
+          </a:xfrm>
+          <a:prstGeom prst="rect">
+            <a:avLst/>
+          </a:prstGeom>
+          <a:noFill/>
+          <a:extLst>
+            <a:ext uri="{909E8E84-426E-40DD-AFC4-6F175D3DCCD1}">
+              <a14:hiddenFill xmlns:a14="http://schemas.microsoft.com/office/drawing/2010/main">
+                <a:solidFill>
+                  <a:srgbClr val="FFFFFF"/>
+                </a:solidFill>
+              </a14:hiddenFill>
+            </a:ext>
+          </a:extLst>
+        </p:spPr>
+      </p:pic>
+    </p:spTree>
+    <p:extLst>
+      <p:ext uri="{BB962C8B-B14F-4D97-AF65-F5344CB8AC3E}">
+        <p14:creationId xmlns:p14="http://schemas.microsoft.com/office/powerpoint/2010/main" val="3312057560"/>
+      </p:ext>
+    </p:extLst>
+  </p:cSld>
+  <p:clrMapOvr>
+    <a:masterClrMapping/>
+  </p:clrMapOvr>
+</p:sld>
+</file>
+
+<file path=ppt/slides/slide13.xml><?xml version="1.0" encoding="utf-8"?>
+<p:sld xmlns:a="http://schemas.openxmlformats.org/drawingml/2006/main" xmlns:r="http://schemas.openxmlformats.org/officeDocument/2006/relationships" xmlns:p="http://schemas.openxmlformats.org/presentationml/2006/main">
+  <p:cSld>
+    <p:spTree>
+      <p:nvGrpSpPr>
+        <p:cNvPr id="1" name=""/>
+        <p:cNvGrpSpPr/>
+        <p:nvPr/>
+      </p:nvGrpSpPr>
+      <p:grpSpPr>
+        <a:xfrm>
+          <a:off x="0" y="0"/>
+          <a:ext cx="0" cy="0"/>
+          <a:chOff x="0" y="0"/>
+          <a:chExt cx="0" cy="0"/>
+        </a:xfrm>
+      </p:grpSpPr>
+      <p:sp>
+        <p:nvSpPr>
+          <p:cNvPr id="2" name="Cím 1">
+            <a:extLst>
+              <a:ext uri="{FF2B5EF4-FFF2-40B4-BE49-F238E27FC236}">
+                <a16:creationId xmlns:a16="http://schemas.microsoft.com/office/drawing/2014/main" id="{14184F90-E7F8-4F1F-89C4-6FC5132512FB}"/>
+              </a:ext>
+            </a:extLst>
+          </p:cNvPr>
+          <p:cNvSpPr>
+            <a:spLocks noGrp="1"/>
+          </p:cNvSpPr>
+          <p:nvPr>
+            <p:ph type="title"/>
+          </p:nvPr>
+        </p:nvSpPr>
+        <p:spPr/>
+        <p:txBody>
+          <a:bodyPr/>
+          <a:lstStyle/>
+          <a:p>
+            <a:r>
+              <a:rPr lang="hu-HU" dirty="0"/>
+              <a:t>Projekt management</a:t>
+            </a:r>
+          </a:p>
+        </p:txBody>
+      </p:sp>
+      <p:sp>
+        <p:nvSpPr>
+          <p:cNvPr id="3" name="Tartalom helye 2">
+            <a:extLst>
+              <a:ext uri="{FF2B5EF4-FFF2-40B4-BE49-F238E27FC236}">
+                <a16:creationId xmlns:a16="http://schemas.microsoft.com/office/drawing/2014/main" id="{D9D3D7E9-CA87-40FA-AABD-4914D82ED31D}"/>
+              </a:ext>
+            </a:extLst>
+          </p:cNvPr>
+          <p:cNvSpPr>
+            <a:spLocks noGrp="1"/>
+          </p:cNvSpPr>
+          <p:nvPr>
+            <p:ph idx="1"/>
+          </p:nvPr>
+        </p:nvSpPr>
+        <p:spPr>
+          <a:xfrm>
+            <a:off x="581193" y="2246050"/>
+            <a:ext cx="1345262" cy="3612749"/>
+          </a:xfrm>
+        </p:spPr>
+        <p:txBody>
+          <a:bodyPr/>
+          <a:lstStyle/>
+          <a:p>
+            <a:r>
+              <a:rPr lang="hu-HU" dirty="0" err="1"/>
+              <a:t>Github</a:t>
+            </a:r>
+            <a:endParaRPr lang="hu-HU" dirty="0"/>
+          </a:p>
+          <a:p>
+            <a:r>
+              <a:rPr lang="hu-HU" dirty="0" err="1"/>
+              <a:t>Trello</a:t>
+            </a:r>
+            <a:endParaRPr lang="hu-HU" dirty="0"/>
+          </a:p>
+        </p:txBody>
+      </p:sp>
+      <p:pic>
+        <p:nvPicPr>
+          <p:cNvPr id="4" name="Kép 3">
+            <a:extLst>
+              <a:ext uri="{FF2B5EF4-FFF2-40B4-BE49-F238E27FC236}">
+                <a16:creationId xmlns:a16="http://schemas.microsoft.com/office/drawing/2014/main" id="{534F2BF1-134E-4926-8490-3E83C5FE65C8}"/>
+              </a:ext>
+            </a:extLst>
+          </p:cNvPr>
+          <p:cNvPicPr>
+            <a:picLocks noChangeAspect="1"/>
+          </p:cNvPicPr>
+          <p:nvPr/>
+        </p:nvPicPr>
+        <p:blipFill>
+          <a:blip r:embed="rId2"/>
+          <a:stretch>
+            <a:fillRect/>
+          </a:stretch>
+        </p:blipFill>
+        <p:spPr>
+          <a:xfrm>
+            <a:off x="1926455" y="3154400"/>
+            <a:ext cx="4734814" cy="2305368"/>
+          </a:xfrm>
+          <a:prstGeom prst="rect">
+            <a:avLst/>
+          </a:prstGeom>
+        </p:spPr>
+      </p:pic>
+      <p:pic>
+        <p:nvPicPr>
+          <p:cNvPr id="5" name="Kép 4">
+            <a:extLst>
+              <a:ext uri="{FF2B5EF4-FFF2-40B4-BE49-F238E27FC236}">
+                <a16:creationId xmlns:a16="http://schemas.microsoft.com/office/drawing/2014/main" id="{FFE983A8-09B6-4316-82A5-8421BC378023}"/>
+              </a:ext>
+            </a:extLst>
+          </p:cNvPr>
+          <p:cNvPicPr>
+            <a:picLocks noChangeAspect="1"/>
+          </p:cNvPicPr>
+          <p:nvPr/>
+        </p:nvPicPr>
+        <p:blipFill>
+          <a:blip r:embed="rId3"/>
+          <a:stretch>
+            <a:fillRect/>
+          </a:stretch>
+        </p:blipFill>
+        <p:spPr>
+          <a:xfrm>
+            <a:off x="6746122" y="2847039"/>
+            <a:ext cx="5303835" cy="2920089"/>
+          </a:xfrm>
+          <a:prstGeom prst="rect">
+            <a:avLst/>
+          </a:prstGeom>
+        </p:spPr>
+      </p:pic>
+    </p:spTree>
+    <p:extLst>
+      <p:ext uri="{BB962C8B-B14F-4D97-AF65-F5344CB8AC3E}">
+        <p14:creationId xmlns:p14="http://schemas.microsoft.com/office/powerpoint/2010/main" val="129555341"/>
+      </p:ext>
+    </p:extLst>
+  </p:cSld>
+  <p:clrMapOvr>
+    <a:masterClrMapping/>
+  </p:clrMapOvr>
+</p:sld>
+</file>
+
+<file path=ppt/slides/slide14.xml><?xml version="1.0" encoding="utf-8"?>
+<p:sld xmlns:a="http://schemas.openxmlformats.org/drawingml/2006/main" xmlns:r="http://schemas.openxmlformats.org/officeDocument/2006/relationships" xmlns:p="http://schemas.openxmlformats.org/presentationml/2006/main">
+  <p:cSld>
+    <p:spTree>
+      <p:nvGrpSpPr>
+        <p:cNvPr id="1" name=""/>
+        <p:cNvGrpSpPr/>
+        <p:nvPr/>
+      </p:nvGrpSpPr>
+      <p:grpSpPr>
+        <a:xfrm>
+          <a:off x="0" y="0"/>
+          <a:ext cx="0" cy="0"/>
+          <a:chOff x="0" y="0"/>
+          <a:chExt cx="0" cy="0"/>
+        </a:xfrm>
+      </p:grpSpPr>
+      <p:sp>
+        <p:nvSpPr>
+          <p:cNvPr id="2" name="Cím 1">
+            <a:extLst>
+              <a:ext uri="{FF2B5EF4-FFF2-40B4-BE49-F238E27FC236}">
+                <a16:creationId xmlns:a16="http://schemas.microsoft.com/office/drawing/2014/main" id="{1CFF773B-10ED-41E5-B097-F6C287EF4931}"/>
+              </a:ext>
+            </a:extLst>
+          </p:cNvPr>
+          <p:cNvSpPr>
+            <a:spLocks noGrp="1"/>
+          </p:cNvSpPr>
+          <p:nvPr>
+            <p:ph type="title"/>
+          </p:nvPr>
+        </p:nvSpPr>
+        <p:spPr/>
+        <p:txBody>
+          <a:bodyPr/>
+          <a:lstStyle/>
+          <a:p>
+            <a:r>
+              <a:rPr lang="hu-HU" dirty="0"/>
+              <a:t>Parfümvilág – </a:t>
+            </a:r>
+            <a:r>
+              <a:rPr lang="hu-HU" dirty="0" err="1"/>
+              <a:t>Perfume</a:t>
+            </a:r>
+            <a:r>
+              <a:rPr lang="hu-HU" dirty="0"/>
+              <a:t> </a:t>
+            </a:r>
+            <a:r>
+              <a:rPr lang="hu-HU" dirty="0" err="1"/>
+              <a:t>Discovery</a:t>
+            </a:r>
+            <a:r>
+              <a:rPr lang="hu-HU" dirty="0"/>
+              <a:t> Platform</a:t>
+            </a:r>
+          </a:p>
+        </p:txBody>
+      </p:sp>
+      <p:sp>
+        <p:nvSpPr>
+          <p:cNvPr id="3" name="Tartalom helye 2">
+            <a:extLst>
+              <a:ext uri="{FF2B5EF4-FFF2-40B4-BE49-F238E27FC236}">
+                <a16:creationId xmlns:a16="http://schemas.microsoft.com/office/drawing/2014/main" id="{C5958C8B-D895-4E18-A52B-BEF680FFE98F}"/>
+              </a:ext>
+            </a:extLst>
+          </p:cNvPr>
+          <p:cNvSpPr>
+            <a:spLocks noGrp="1"/>
+          </p:cNvSpPr>
+          <p:nvPr>
+            <p:ph idx="1"/>
+          </p:nvPr>
+        </p:nvSpPr>
+        <p:spPr/>
+        <p:txBody>
+          <a:bodyPr>
+            <a:normAutofit lnSpcReduction="10000"/>
+          </a:bodyPr>
+          <a:lstStyle/>
+          <a:p>
+            <a:r>
+              <a:rPr lang="hu-HU" dirty="0"/>
+              <a:t>Parfümvilág is a web-</a:t>
+            </a:r>
+            <a:r>
+              <a:rPr lang="hu-HU" dirty="0" err="1"/>
+              <a:t>based</a:t>
+            </a:r>
+            <a:r>
+              <a:rPr lang="hu-HU" dirty="0"/>
+              <a:t> platform </a:t>
+            </a:r>
+            <a:r>
+              <a:rPr lang="hu-HU" dirty="0" err="1"/>
+              <a:t>designed</a:t>
+            </a:r>
+            <a:r>
+              <a:rPr lang="hu-HU" dirty="0"/>
+              <a:t> </a:t>
+            </a:r>
+            <a:r>
+              <a:rPr lang="hu-HU" dirty="0" err="1"/>
+              <a:t>to</a:t>
+            </a:r>
+            <a:r>
+              <a:rPr lang="hu-HU" dirty="0"/>
+              <a:t> </a:t>
+            </a:r>
+            <a:r>
+              <a:rPr lang="hu-HU" dirty="0" err="1"/>
+              <a:t>help</a:t>
+            </a:r>
+            <a:r>
+              <a:rPr lang="hu-HU" dirty="0"/>
+              <a:t> </a:t>
+            </a:r>
+            <a:r>
+              <a:rPr lang="hu-HU" dirty="0" err="1"/>
+              <a:t>users</a:t>
+            </a:r>
+            <a:r>
+              <a:rPr lang="hu-HU" dirty="0"/>
+              <a:t> </a:t>
+            </a:r>
+            <a:r>
+              <a:rPr lang="hu-HU" dirty="0" err="1"/>
+              <a:t>discover</a:t>
+            </a:r>
+            <a:r>
+              <a:rPr lang="hu-HU" dirty="0"/>
+              <a:t> and </a:t>
+            </a:r>
+            <a:r>
+              <a:rPr lang="hu-HU" dirty="0" err="1"/>
+              <a:t>explore</a:t>
+            </a:r>
+            <a:r>
+              <a:rPr lang="hu-HU" dirty="0"/>
+              <a:t> </a:t>
+            </a:r>
+            <a:r>
+              <a:rPr lang="hu-HU" dirty="0" err="1"/>
+              <a:t>perfumes</a:t>
+            </a:r>
+            <a:r>
+              <a:rPr lang="hu-HU" dirty="0"/>
+              <a:t> </a:t>
+            </a:r>
+            <a:r>
+              <a:rPr lang="hu-HU" dirty="0" err="1"/>
+              <a:t>based</a:t>
+            </a:r>
+            <a:r>
+              <a:rPr lang="hu-HU" dirty="0"/>
+              <a:t> </a:t>
+            </a:r>
+            <a:r>
+              <a:rPr lang="hu-HU" dirty="0" err="1"/>
+              <a:t>on</a:t>
+            </a:r>
+            <a:r>
+              <a:rPr lang="hu-HU" dirty="0"/>
+              <a:t> </a:t>
+            </a:r>
+            <a:r>
+              <a:rPr lang="hu-HU" dirty="0" err="1"/>
+              <a:t>various</a:t>
+            </a:r>
+            <a:r>
+              <a:rPr lang="hu-HU" dirty="0"/>
+              <a:t> </a:t>
+            </a:r>
+            <a:r>
+              <a:rPr lang="hu-HU" dirty="0" err="1"/>
+              <a:t>filters</a:t>
+            </a:r>
+            <a:r>
+              <a:rPr lang="hu-HU" dirty="0"/>
+              <a:t> </a:t>
+            </a:r>
+            <a:r>
+              <a:rPr lang="hu-HU" dirty="0" err="1"/>
+              <a:t>such</a:t>
+            </a:r>
+            <a:r>
+              <a:rPr lang="hu-HU" dirty="0"/>
+              <a:t> </a:t>
+            </a:r>
+            <a:r>
+              <a:rPr lang="hu-HU" dirty="0" err="1"/>
+              <a:t>as</a:t>
+            </a:r>
+            <a:r>
+              <a:rPr lang="hu-HU" dirty="0"/>
+              <a:t> </a:t>
+            </a:r>
+            <a:r>
+              <a:rPr lang="hu-HU" dirty="0" err="1"/>
+              <a:t>brand</a:t>
+            </a:r>
+            <a:r>
+              <a:rPr lang="hu-HU" dirty="0"/>
+              <a:t>, </a:t>
+            </a:r>
+            <a:r>
+              <a:rPr lang="hu-HU" dirty="0" err="1"/>
+              <a:t>scent</a:t>
+            </a:r>
+            <a:r>
+              <a:rPr lang="hu-HU" dirty="0"/>
+              <a:t>, </a:t>
+            </a:r>
+            <a:r>
+              <a:rPr lang="hu-HU" dirty="0" err="1"/>
+              <a:t>gender</a:t>
+            </a:r>
+            <a:r>
+              <a:rPr lang="hu-HU" dirty="0"/>
+              <a:t>, and </a:t>
+            </a:r>
+            <a:r>
+              <a:rPr lang="hu-HU" dirty="0" err="1"/>
+              <a:t>price</a:t>
+            </a:r>
+            <a:r>
+              <a:rPr lang="hu-HU" dirty="0"/>
+              <a:t>.</a:t>
+            </a:r>
+          </a:p>
+          <a:p>
+            <a:r>
+              <a:rPr lang="hu-HU" dirty="0"/>
+              <a:t>Key </a:t>
+            </a:r>
+            <a:r>
+              <a:rPr lang="hu-HU" dirty="0" err="1"/>
+              <a:t>Features</a:t>
+            </a:r>
+            <a:r>
+              <a:rPr lang="hu-HU" dirty="0"/>
+              <a:t>: </a:t>
+            </a:r>
+          </a:p>
+          <a:p>
+            <a:pPr lvl="1"/>
+            <a:r>
+              <a:rPr lang="hu-HU" dirty="0"/>
+              <a:t>Advanced </a:t>
+            </a:r>
+            <a:r>
+              <a:rPr lang="hu-HU" dirty="0" err="1"/>
+              <a:t>search</a:t>
+            </a:r>
+            <a:r>
+              <a:rPr lang="hu-HU" dirty="0"/>
+              <a:t> </a:t>
+            </a:r>
+            <a:r>
+              <a:rPr lang="hu-HU" dirty="0" err="1"/>
+              <a:t>functionality</a:t>
+            </a:r>
+            <a:r>
+              <a:rPr lang="hu-HU" dirty="0"/>
+              <a:t> </a:t>
+            </a:r>
+            <a:r>
+              <a:rPr lang="hu-HU" dirty="0" err="1"/>
+              <a:t>with</a:t>
+            </a:r>
+            <a:r>
+              <a:rPr lang="hu-HU" dirty="0"/>
+              <a:t> </a:t>
+            </a:r>
+            <a:r>
+              <a:rPr lang="hu-HU" dirty="0" err="1"/>
+              <a:t>filters</a:t>
+            </a:r>
+            <a:r>
+              <a:rPr lang="hu-HU" dirty="0"/>
+              <a:t> (</a:t>
+            </a:r>
+            <a:r>
+              <a:rPr lang="hu-HU" dirty="0" err="1"/>
+              <a:t>brand</a:t>
+            </a:r>
+            <a:r>
+              <a:rPr lang="hu-HU" dirty="0"/>
+              <a:t>, </a:t>
+            </a:r>
+            <a:r>
+              <a:rPr lang="hu-HU" dirty="0" err="1"/>
+              <a:t>scent</a:t>
+            </a:r>
+            <a:r>
+              <a:rPr lang="hu-HU" dirty="0"/>
+              <a:t>, </a:t>
+            </a:r>
+            <a:r>
+              <a:rPr lang="hu-HU" dirty="0" err="1"/>
+              <a:t>gender</a:t>
+            </a:r>
+            <a:r>
+              <a:rPr lang="hu-HU" dirty="0"/>
+              <a:t>).</a:t>
+            </a:r>
+          </a:p>
+          <a:p>
+            <a:pPr lvl="1"/>
+            <a:r>
+              <a:rPr lang="hu-HU" dirty="0" err="1"/>
+              <a:t>Pagination</a:t>
+            </a:r>
+            <a:r>
+              <a:rPr lang="hu-HU" dirty="0"/>
+              <a:t> </a:t>
+            </a:r>
+            <a:r>
+              <a:rPr lang="hu-HU" dirty="0" err="1"/>
+              <a:t>for</a:t>
+            </a:r>
+            <a:r>
+              <a:rPr lang="hu-HU" dirty="0"/>
+              <a:t> </a:t>
+            </a:r>
+            <a:r>
+              <a:rPr lang="hu-HU" dirty="0" err="1"/>
+              <a:t>seamless</a:t>
+            </a:r>
+            <a:r>
+              <a:rPr lang="hu-HU" dirty="0"/>
+              <a:t> </a:t>
+            </a:r>
+            <a:r>
+              <a:rPr lang="hu-HU" dirty="0" err="1"/>
+              <a:t>navigation</a:t>
+            </a:r>
+            <a:r>
+              <a:rPr lang="hu-HU" dirty="0"/>
+              <a:t> </a:t>
+            </a:r>
+            <a:r>
+              <a:rPr lang="hu-HU" dirty="0" err="1"/>
+              <a:t>across</a:t>
+            </a:r>
+            <a:r>
+              <a:rPr lang="hu-HU" dirty="0"/>
+              <a:t> </a:t>
+            </a:r>
+            <a:r>
+              <a:rPr lang="hu-HU" dirty="0" err="1"/>
+              <a:t>large</a:t>
+            </a:r>
+            <a:r>
+              <a:rPr lang="hu-HU" dirty="0"/>
+              <a:t> </a:t>
+            </a:r>
+            <a:r>
+              <a:rPr lang="hu-HU" dirty="0" err="1"/>
+              <a:t>datasets</a:t>
+            </a:r>
+            <a:r>
+              <a:rPr lang="hu-HU" dirty="0"/>
+              <a:t>.</a:t>
+            </a:r>
+          </a:p>
+          <a:p>
+            <a:pPr lvl="1"/>
+            <a:r>
+              <a:rPr lang="hu-HU" dirty="0" err="1"/>
+              <a:t>User-friendly</a:t>
+            </a:r>
+            <a:r>
+              <a:rPr lang="hu-HU" dirty="0"/>
+              <a:t> </a:t>
+            </a:r>
+            <a:r>
+              <a:rPr lang="hu-HU" dirty="0" err="1"/>
+              <a:t>interface</a:t>
+            </a:r>
+            <a:r>
+              <a:rPr lang="hu-HU" dirty="0"/>
+              <a:t> </a:t>
+            </a:r>
+            <a:r>
+              <a:rPr lang="hu-HU" dirty="0" err="1"/>
+              <a:t>with</a:t>
+            </a:r>
+            <a:r>
+              <a:rPr lang="hu-HU" dirty="0"/>
+              <a:t> </a:t>
+            </a:r>
+            <a:r>
+              <a:rPr lang="hu-HU" dirty="0" err="1"/>
+              <a:t>responsive</a:t>
+            </a:r>
+            <a:r>
+              <a:rPr lang="hu-HU" dirty="0"/>
+              <a:t> design.</a:t>
+            </a:r>
+          </a:p>
+          <a:p>
+            <a:pPr lvl="1"/>
+            <a:r>
+              <a:rPr lang="hu-HU" dirty="0"/>
+              <a:t>Backend API </a:t>
+            </a:r>
+            <a:r>
+              <a:rPr lang="hu-HU" dirty="0" err="1"/>
+              <a:t>integration</a:t>
+            </a:r>
+            <a:r>
+              <a:rPr lang="hu-HU" dirty="0"/>
+              <a:t> </a:t>
+            </a:r>
+            <a:r>
+              <a:rPr lang="hu-HU" dirty="0" err="1"/>
+              <a:t>for</a:t>
+            </a:r>
+            <a:r>
+              <a:rPr lang="hu-HU" dirty="0"/>
+              <a:t> </a:t>
+            </a:r>
+            <a:r>
+              <a:rPr lang="hu-HU" dirty="0" err="1"/>
+              <a:t>dynamic</a:t>
+            </a:r>
+            <a:r>
+              <a:rPr lang="hu-HU" dirty="0"/>
+              <a:t> </a:t>
+            </a:r>
+            <a:r>
+              <a:rPr lang="hu-HU" dirty="0" err="1"/>
+              <a:t>data</a:t>
+            </a:r>
+            <a:r>
+              <a:rPr lang="hu-HU" dirty="0"/>
+              <a:t> </a:t>
+            </a:r>
+            <a:r>
+              <a:rPr lang="hu-HU" dirty="0" err="1"/>
+              <a:t>fetching</a:t>
+            </a:r>
+            <a:r>
+              <a:rPr lang="hu-HU" dirty="0"/>
+              <a:t>.</a:t>
+            </a:r>
+          </a:p>
+          <a:p>
+            <a:r>
+              <a:rPr lang="hu-HU" dirty="0"/>
+              <a:t>Technologies </a:t>
+            </a:r>
+            <a:r>
+              <a:rPr lang="hu-HU" dirty="0" err="1"/>
+              <a:t>Used</a:t>
+            </a:r>
+            <a:r>
+              <a:rPr lang="hu-HU" dirty="0"/>
+              <a:t>: </a:t>
+            </a:r>
+          </a:p>
+          <a:p>
+            <a:pPr lvl="1"/>
+            <a:r>
+              <a:rPr lang="hu-HU" dirty="0"/>
+              <a:t>Frontend: React.js, </a:t>
+            </a:r>
+            <a:r>
+              <a:rPr lang="hu-HU" dirty="0" err="1"/>
+              <a:t>React</a:t>
+            </a:r>
+            <a:r>
+              <a:rPr lang="hu-HU" dirty="0"/>
+              <a:t> Router, </a:t>
+            </a:r>
+            <a:r>
+              <a:rPr lang="hu-HU" dirty="0" err="1"/>
+              <a:t>Axios</a:t>
+            </a:r>
+            <a:r>
+              <a:rPr lang="hu-HU" dirty="0"/>
+              <a:t>, CSS </a:t>
+            </a:r>
+            <a:r>
+              <a:rPr lang="hu-HU" dirty="0" err="1"/>
+              <a:t>for</a:t>
+            </a:r>
+            <a:r>
+              <a:rPr lang="hu-HU" dirty="0"/>
+              <a:t> </a:t>
+            </a:r>
+            <a:r>
+              <a:rPr lang="hu-HU" dirty="0" err="1"/>
+              <a:t>styling</a:t>
+            </a:r>
+            <a:r>
+              <a:rPr lang="hu-HU" dirty="0"/>
+              <a:t>.</a:t>
+            </a:r>
+          </a:p>
+          <a:p>
+            <a:pPr lvl="1"/>
+            <a:r>
+              <a:rPr lang="hu-HU" dirty="0"/>
+              <a:t>Backend: Node.js, Express.js, </a:t>
+            </a:r>
+            <a:r>
+              <a:rPr lang="hu-HU" dirty="0" err="1"/>
+              <a:t>MySQL</a:t>
+            </a:r>
+            <a:r>
+              <a:rPr lang="hu-HU" dirty="0"/>
+              <a:t> </a:t>
+            </a:r>
+            <a:r>
+              <a:rPr lang="hu-HU" dirty="0" err="1"/>
+              <a:t>for</a:t>
+            </a:r>
+            <a:r>
+              <a:rPr lang="hu-HU" dirty="0"/>
+              <a:t> </a:t>
+            </a:r>
+            <a:r>
+              <a:rPr lang="hu-HU" dirty="0" err="1"/>
+              <a:t>database</a:t>
+            </a:r>
+            <a:r>
+              <a:rPr lang="hu-HU" dirty="0"/>
+              <a:t> management.</a:t>
+            </a:r>
+          </a:p>
+          <a:p>
+            <a:endParaRPr lang="hu-HU" dirty="0"/>
+          </a:p>
+        </p:txBody>
+      </p:sp>
+    </p:spTree>
+    <p:extLst>
+      <p:ext uri="{BB962C8B-B14F-4D97-AF65-F5344CB8AC3E}">
+        <p14:creationId xmlns:p14="http://schemas.microsoft.com/office/powerpoint/2010/main" val="3985336066"/>
+      </p:ext>
+    </p:extLst>
+  </p:cSld>
+  <p:clrMapOvr>
+    <a:masterClrMapping/>
+  </p:clrMapOvr>
+</p:sld>
+</file>
+
+<file path=ppt/slides/slide15.xml><?xml version="1.0" encoding="utf-8"?>
+<p:sld xmlns:a="http://schemas.openxmlformats.org/drawingml/2006/main" xmlns:r="http://schemas.openxmlformats.org/officeDocument/2006/relationships" xmlns:p="http://schemas.openxmlformats.org/presentationml/2006/main">
+  <p:cSld>
+    <p:spTree>
+      <p:nvGrpSpPr>
+        <p:cNvPr id="1" name=""/>
+        <p:cNvGrpSpPr/>
+        <p:nvPr/>
+      </p:nvGrpSpPr>
+      <p:grpSpPr>
+        <a:xfrm>
+          <a:off x="0" y="0"/>
+          <a:ext cx="0" cy="0"/>
+          <a:chOff x="0" y="0"/>
+          <a:chExt cx="0" cy="0"/>
+        </a:xfrm>
+      </p:grpSpPr>
+      <p:sp>
+        <p:nvSpPr>
+          <p:cNvPr id="2" name="Cím 1">
+            <a:extLst>
+              <a:ext uri="{FF2B5EF4-FFF2-40B4-BE49-F238E27FC236}">
+                <a16:creationId xmlns:a16="http://schemas.microsoft.com/office/drawing/2014/main" id="{1B5BD7FA-94FF-4E57-AD13-CAF670A3493B}"/>
+              </a:ext>
+            </a:extLst>
+          </p:cNvPr>
+          <p:cNvSpPr>
+            <a:spLocks noGrp="1"/>
+          </p:cNvSpPr>
+          <p:nvPr>
+            <p:ph type="title"/>
+          </p:nvPr>
+        </p:nvSpPr>
+        <p:spPr/>
+        <p:txBody>
+          <a:bodyPr/>
+          <a:lstStyle/>
+          <a:p>
+            <a:r>
+              <a:rPr lang="hu-HU" dirty="0" err="1"/>
+              <a:t>Our</a:t>
+            </a:r>
+            <a:r>
+              <a:rPr lang="hu-HU" dirty="0"/>
+              <a:t> Team – Kertész Márton &amp; Laczy Miklós</a:t>
+            </a:r>
+          </a:p>
+        </p:txBody>
+      </p:sp>
+      <p:sp>
+        <p:nvSpPr>
+          <p:cNvPr id="3" name="Tartalom helye 2">
+            <a:extLst>
+              <a:ext uri="{FF2B5EF4-FFF2-40B4-BE49-F238E27FC236}">
+                <a16:creationId xmlns:a16="http://schemas.microsoft.com/office/drawing/2014/main" id="{B823C719-AA90-4E54-BB61-475F1145C0C6}"/>
+              </a:ext>
+            </a:extLst>
+          </p:cNvPr>
+          <p:cNvSpPr>
+            <a:spLocks noGrp="1"/>
+          </p:cNvSpPr>
+          <p:nvPr>
+            <p:ph idx="1"/>
+          </p:nvPr>
+        </p:nvSpPr>
+        <p:spPr>
+          <a:xfrm>
+            <a:off x="581193" y="1890944"/>
+            <a:ext cx="4958473" cy="4776186"/>
+          </a:xfrm>
+        </p:spPr>
+        <p:txBody>
+          <a:bodyPr>
+            <a:normAutofit fontScale="92500" lnSpcReduction="10000"/>
+          </a:bodyPr>
+          <a:lstStyle/>
+          <a:p>
+            <a:r>
+              <a:rPr lang="hu-HU" sz="1700" b="1" dirty="0"/>
+              <a:t>Kertész Márton – Backend </a:t>
+            </a:r>
+            <a:r>
+              <a:rPr lang="hu-HU" sz="1700" b="1" dirty="0" err="1"/>
+              <a:t>Developer</a:t>
+            </a:r>
+            <a:endParaRPr lang="hu-HU" sz="1700" b="1" dirty="0"/>
+          </a:p>
+          <a:p>
+            <a:r>
+              <a:rPr lang="hu-HU" sz="1700" dirty="0" err="1"/>
+              <a:t>Role</a:t>
+            </a:r>
+            <a:r>
+              <a:rPr lang="hu-HU" sz="1700" dirty="0"/>
+              <a:t>: </a:t>
+            </a:r>
+            <a:r>
+              <a:rPr lang="hu-HU" sz="1700" dirty="0" err="1"/>
+              <a:t>Responsible</a:t>
+            </a:r>
+            <a:r>
+              <a:rPr lang="hu-HU" sz="1700" dirty="0"/>
+              <a:t> </a:t>
+            </a:r>
+            <a:r>
+              <a:rPr lang="hu-HU" sz="1700" dirty="0" err="1"/>
+              <a:t>for</a:t>
+            </a:r>
+            <a:r>
+              <a:rPr lang="hu-HU" sz="1700" dirty="0"/>
+              <a:t> </a:t>
+            </a:r>
+            <a:r>
+              <a:rPr lang="hu-HU" sz="1700" dirty="0" err="1"/>
+              <a:t>the</a:t>
+            </a:r>
+            <a:r>
+              <a:rPr lang="hu-HU" sz="1700" dirty="0"/>
+              <a:t> server-</a:t>
+            </a:r>
+            <a:r>
+              <a:rPr lang="hu-HU" sz="1700" dirty="0" err="1"/>
+              <a:t>side</a:t>
+            </a:r>
+            <a:r>
+              <a:rPr lang="hu-HU" sz="1700" dirty="0"/>
+              <a:t> </a:t>
+            </a:r>
+            <a:r>
+              <a:rPr lang="hu-HU" sz="1700" dirty="0" err="1"/>
+              <a:t>logic</a:t>
+            </a:r>
+            <a:r>
+              <a:rPr lang="hu-HU" sz="1700" dirty="0"/>
+              <a:t>, </a:t>
+            </a:r>
+            <a:r>
+              <a:rPr lang="hu-HU" sz="1700" dirty="0" err="1"/>
+              <a:t>database</a:t>
+            </a:r>
+            <a:r>
+              <a:rPr lang="hu-HU" sz="1700" dirty="0"/>
+              <a:t> management, and API </a:t>
+            </a:r>
+            <a:r>
+              <a:rPr lang="hu-HU" sz="1700" dirty="0" err="1"/>
+              <a:t>development</a:t>
+            </a:r>
+            <a:r>
+              <a:rPr lang="hu-HU" sz="1700" dirty="0"/>
+              <a:t>.</a:t>
+            </a:r>
+          </a:p>
+          <a:p>
+            <a:r>
+              <a:rPr lang="hu-HU" sz="1700" dirty="0"/>
+              <a:t>Key </a:t>
+            </a:r>
+            <a:r>
+              <a:rPr lang="hu-HU" sz="1700" dirty="0" err="1"/>
+              <a:t>Contributions</a:t>
+            </a:r>
+            <a:r>
+              <a:rPr lang="hu-HU" sz="1700" dirty="0"/>
+              <a:t>: </a:t>
+            </a:r>
+          </a:p>
+          <a:p>
+            <a:pPr lvl="1"/>
+            <a:r>
+              <a:rPr lang="hu-HU" sz="1700" dirty="0" err="1"/>
+              <a:t>Designed</a:t>
+            </a:r>
+            <a:r>
+              <a:rPr lang="hu-HU" sz="1700" dirty="0"/>
+              <a:t> and </a:t>
+            </a:r>
+            <a:r>
+              <a:rPr lang="hu-HU" sz="1700" dirty="0" err="1"/>
+              <a:t>implemented</a:t>
+            </a:r>
+            <a:r>
+              <a:rPr lang="hu-HU" sz="1700" dirty="0"/>
+              <a:t> </a:t>
+            </a:r>
+            <a:r>
+              <a:rPr lang="hu-HU" sz="1700" dirty="0" err="1"/>
+              <a:t>APIs</a:t>
+            </a:r>
+            <a:r>
+              <a:rPr lang="hu-HU" sz="1700" dirty="0"/>
+              <a:t> </a:t>
+            </a:r>
+            <a:r>
+              <a:rPr lang="hu-HU" sz="1700" dirty="0" err="1"/>
+              <a:t>using</a:t>
+            </a:r>
+            <a:r>
+              <a:rPr lang="hu-HU" sz="1700" dirty="0"/>
+              <a:t> Node.js and Express.js .</a:t>
+            </a:r>
+          </a:p>
+          <a:p>
+            <a:pPr lvl="1"/>
+            <a:r>
+              <a:rPr lang="hu-HU" sz="1700" dirty="0" err="1"/>
+              <a:t>Developed</a:t>
+            </a:r>
+            <a:r>
+              <a:rPr lang="hu-HU" sz="1700" dirty="0"/>
+              <a:t> </a:t>
+            </a:r>
+            <a:r>
+              <a:rPr lang="hu-HU" sz="1700" dirty="0" err="1"/>
+              <a:t>efficient</a:t>
+            </a:r>
+            <a:r>
+              <a:rPr lang="hu-HU" sz="1700" dirty="0"/>
+              <a:t> SQL </a:t>
+            </a:r>
+            <a:r>
+              <a:rPr lang="hu-HU" sz="1700" dirty="0" err="1"/>
+              <a:t>queries</a:t>
+            </a:r>
+            <a:r>
+              <a:rPr lang="hu-HU" sz="1700" dirty="0"/>
+              <a:t> </a:t>
+            </a:r>
+            <a:r>
+              <a:rPr lang="hu-HU" sz="1700" dirty="0" err="1"/>
+              <a:t>to</a:t>
+            </a:r>
+            <a:r>
+              <a:rPr lang="hu-HU" sz="1700" dirty="0"/>
+              <a:t> </a:t>
+            </a:r>
+            <a:r>
+              <a:rPr lang="hu-HU" sz="1700" dirty="0" err="1"/>
+              <a:t>handle</a:t>
+            </a:r>
+            <a:r>
+              <a:rPr lang="hu-HU" sz="1700" dirty="0"/>
+              <a:t> filtering, sorting, and </a:t>
+            </a:r>
+            <a:r>
+              <a:rPr lang="hu-HU" sz="1700" dirty="0" err="1"/>
+              <a:t>pagination</a:t>
+            </a:r>
+            <a:r>
+              <a:rPr lang="hu-HU" sz="1700" dirty="0"/>
+              <a:t> </a:t>
+            </a:r>
+            <a:r>
+              <a:rPr lang="hu-HU" sz="1700" dirty="0" err="1"/>
+              <a:t>for</a:t>
+            </a:r>
+            <a:r>
+              <a:rPr lang="hu-HU" sz="1700" dirty="0"/>
+              <a:t> </a:t>
+            </a:r>
+            <a:r>
+              <a:rPr lang="hu-HU" sz="1700" dirty="0" err="1"/>
+              <a:t>perfumes</a:t>
+            </a:r>
+            <a:r>
+              <a:rPr lang="hu-HU" sz="1700" dirty="0"/>
+              <a:t>, </a:t>
+            </a:r>
+            <a:r>
+              <a:rPr lang="hu-HU" sz="1700" dirty="0" err="1"/>
+              <a:t>brands</a:t>
+            </a:r>
+            <a:r>
+              <a:rPr lang="hu-HU" sz="1700" dirty="0"/>
+              <a:t>, and </a:t>
+            </a:r>
+            <a:r>
+              <a:rPr lang="hu-HU" sz="1700" dirty="0" err="1"/>
+              <a:t>scents</a:t>
+            </a:r>
+            <a:r>
+              <a:rPr lang="hu-HU" sz="1700" dirty="0"/>
+              <a:t>.</a:t>
+            </a:r>
+          </a:p>
+          <a:p>
+            <a:pPr lvl="1"/>
+            <a:r>
+              <a:rPr lang="hu-HU" sz="1700" dirty="0" err="1"/>
+              <a:t>Integrated</a:t>
+            </a:r>
+            <a:r>
+              <a:rPr lang="hu-HU" sz="1700" dirty="0"/>
+              <a:t> </a:t>
+            </a:r>
+            <a:r>
+              <a:rPr lang="hu-HU" sz="1700" dirty="0" err="1"/>
+              <a:t>MySQL</a:t>
+            </a:r>
+            <a:r>
+              <a:rPr lang="hu-HU" sz="1700" dirty="0"/>
+              <a:t> </a:t>
+            </a:r>
+            <a:r>
+              <a:rPr lang="hu-HU" sz="1700" dirty="0" err="1"/>
+              <a:t>for</a:t>
+            </a:r>
+            <a:r>
+              <a:rPr lang="hu-HU" sz="1700" dirty="0"/>
+              <a:t> </a:t>
+            </a:r>
+            <a:r>
+              <a:rPr lang="hu-HU" sz="1700" dirty="0" err="1"/>
+              <a:t>database</a:t>
+            </a:r>
+            <a:r>
+              <a:rPr lang="hu-HU" sz="1700" dirty="0"/>
+              <a:t> </a:t>
+            </a:r>
+            <a:r>
+              <a:rPr lang="hu-HU" sz="1700" dirty="0" err="1"/>
+              <a:t>operations</a:t>
+            </a:r>
+            <a:r>
+              <a:rPr lang="hu-HU" sz="1700" dirty="0"/>
+              <a:t>, </a:t>
+            </a:r>
+            <a:r>
+              <a:rPr lang="hu-HU" sz="1700" dirty="0" err="1"/>
+              <a:t>ensuring</a:t>
+            </a:r>
+            <a:r>
+              <a:rPr lang="hu-HU" sz="1700" dirty="0"/>
+              <a:t> </a:t>
+            </a:r>
+            <a:r>
+              <a:rPr lang="hu-HU" sz="1700" dirty="0" err="1"/>
+              <a:t>data</a:t>
+            </a:r>
+            <a:r>
+              <a:rPr lang="hu-HU" sz="1700" dirty="0"/>
+              <a:t> </a:t>
+            </a:r>
+            <a:r>
+              <a:rPr lang="hu-HU" sz="1700" dirty="0" err="1"/>
+              <a:t>integrity</a:t>
+            </a:r>
+            <a:r>
+              <a:rPr lang="hu-HU" sz="1700" dirty="0"/>
+              <a:t> and </a:t>
+            </a:r>
+            <a:r>
+              <a:rPr lang="hu-HU" sz="1700" dirty="0" err="1"/>
+              <a:t>scalability</a:t>
+            </a:r>
+            <a:r>
+              <a:rPr lang="hu-HU" sz="1700" dirty="0"/>
+              <a:t>.</a:t>
+            </a:r>
+          </a:p>
+          <a:p>
+            <a:pPr lvl="1"/>
+            <a:r>
+              <a:rPr lang="hu-HU" sz="1700" dirty="0" err="1"/>
+              <a:t>Implemented</a:t>
+            </a:r>
+            <a:r>
+              <a:rPr lang="hu-HU" sz="1700" dirty="0"/>
+              <a:t> </a:t>
+            </a:r>
+            <a:r>
+              <a:rPr lang="hu-HU" sz="1700" dirty="0" err="1"/>
+              <a:t>authentication</a:t>
+            </a:r>
+            <a:r>
+              <a:rPr lang="hu-HU" sz="1700" dirty="0"/>
+              <a:t> and </a:t>
+            </a:r>
+            <a:r>
+              <a:rPr lang="hu-HU" sz="1700" dirty="0" err="1"/>
+              <a:t>authorization</a:t>
+            </a:r>
+            <a:r>
+              <a:rPr lang="hu-HU" sz="1700" dirty="0"/>
+              <a:t> </a:t>
+            </a:r>
+            <a:r>
+              <a:rPr lang="hu-HU" sz="1700" dirty="0" err="1"/>
+              <a:t>using</a:t>
+            </a:r>
+            <a:r>
+              <a:rPr lang="hu-HU" sz="1700" dirty="0"/>
+              <a:t> JWT (JSON Web </a:t>
+            </a:r>
+            <a:r>
+              <a:rPr lang="hu-HU" sz="1700" dirty="0" err="1"/>
+              <a:t>Tokens</a:t>
+            </a:r>
+            <a:r>
+              <a:rPr lang="hu-HU" sz="1700" dirty="0"/>
+              <a:t>) </a:t>
+            </a:r>
+            <a:r>
+              <a:rPr lang="hu-HU" sz="1700" dirty="0" err="1"/>
+              <a:t>for</a:t>
+            </a:r>
+            <a:r>
+              <a:rPr lang="hu-HU" sz="1700" dirty="0"/>
+              <a:t> </a:t>
+            </a:r>
+            <a:r>
+              <a:rPr lang="hu-HU" sz="1700" dirty="0" err="1"/>
+              <a:t>secure</a:t>
+            </a:r>
+            <a:r>
+              <a:rPr lang="hu-HU" sz="1700" dirty="0"/>
+              <a:t> </a:t>
+            </a:r>
+            <a:r>
+              <a:rPr lang="hu-HU" sz="1700" dirty="0" err="1"/>
+              <a:t>user</a:t>
+            </a:r>
+            <a:r>
+              <a:rPr lang="hu-HU" sz="1700" dirty="0"/>
+              <a:t> management.</a:t>
+            </a:r>
+          </a:p>
+          <a:p>
+            <a:pPr lvl="1"/>
+            <a:r>
+              <a:rPr lang="hu-HU" sz="1700" dirty="0" err="1"/>
+              <a:t>Optimized</a:t>
+            </a:r>
+            <a:r>
+              <a:rPr lang="hu-HU" sz="1700" dirty="0"/>
+              <a:t> backend performance </a:t>
+            </a:r>
+            <a:r>
+              <a:rPr lang="hu-HU" sz="1700" dirty="0" err="1"/>
+              <a:t>to</a:t>
+            </a:r>
+            <a:r>
+              <a:rPr lang="hu-HU" sz="1700" dirty="0"/>
+              <a:t> </a:t>
+            </a:r>
+            <a:r>
+              <a:rPr lang="hu-HU" sz="1700" dirty="0" err="1"/>
+              <a:t>handle</a:t>
+            </a:r>
+            <a:r>
+              <a:rPr lang="hu-HU" sz="1700" dirty="0"/>
+              <a:t> </a:t>
+            </a:r>
+            <a:r>
+              <a:rPr lang="hu-HU" sz="1700" dirty="0" err="1"/>
+              <a:t>large</a:t>
+            </a:r>
+            <a:r>
+              <a:rPr lang="hu-HU" sz="1700" dirty="0"/>
+              <a:t> </a:t>
+            </a:r>
+            <a:r>
+              <a:rPr lang="hu-HU" sz="1700" dirty="0" err="1"/>
+              <a:t>datasets</a:t>
+            </a:r>
+            <a:r>
+              <a:rPr lang="hu-HU" sz="1700" dirty="0"/>
+              <a:t> and </a:t>
+            </a:r>
+            <a:r>
+              <a:rPr lang="hu-HU" sz="1700" dirty="0" err="1"/>
+              <a:t>complex</a:t>
+            </a:r>
+            <a:r>
+              <a:rPr lang="hu-HU" sz="1700" dirty="0"/>
+              <a:t> </a:t>
+            </a:r>
+            <a:r>
+              <a:rPr lang="hu-HU" sz="1700" dirty="0" err="1"/>
+              <a:t>queries</a:t>
+            </a:r>
+            <a:r>
+              <a:rPr lang="hu-HU" sz="1700" dirty="0"/>
+              <a:t>.</a:t>
+            </a:r>
+          </a:p>
+          <a:p>
+            <a:endParaRPr lang="hu-HU" dirty="0"/>
+          </a:p>
+        </p:txBody>
+      </p:sp>
+      <p:sp>
+        <p:nvSpPr>
+          <p:cNvPr id="5" name="Tartalom helye 2">
+            <a:extLst>
+              <a:ext uri="{FF2B5EF4-FFF2-40B4-BE49-F238E27FC236}">
+                <a16:creationId xmlns:a16="http://schemas.microsoft.com/office/drawing/2014/main" id="{421CC0B5-44FA-40FA-9397-8696433EF8F6}"/>
+              </a:ext>
+            </a:extLst>
+          </p:cNvPr>
+          <p:cNvSpPr txBox="1">
+            <a:spLocks/>
+          </p:cNvSpPr>
+          <p:nvPr/>
+        </p:nvSpPr>
+        <p:spPr>
+          <a:xfrm>
+            <a:off x="5998051" y="1892424"/>
+            <a:ext cx="4958473" cy="4776186"/>
+          </a:xfrm>
+          <a:prstGeom prst="rect">
+            <a:avLst/>
+          </a:prstGeom>
+        </p:spPr>
+        <p:txBody>
+          <a:bodyPr vert="horz" lIns="91440" tIns="45720" rIns="91440" bIns="45720" rtlCol="0" anchor="ctr">
+            <a:normAutofit lnSpcReduction="10000"/>
+          </a:bodyPr>
+          <a:lstStyle>
+            <a:lvl1pPr marL="306000" indent="-306000" algn="l" defTabSz="457200" rtl="0" eaLnBrk="1" latinLnBrk="0" hangingPunct="1">
+              <a:spcBef>
+                <a:spcPct val="20000"/>
+              </a:spcBef>
+              <a:spcAft>
+                <a:spcPts val="600"/>
+              </a:spcAft>
+              <a:buClr>
+                <a:schemeClr val="accent2"/>
+              </a:buClr>
+              <a:buSzPct val="92000"/>
+              <a:buFont typeface="Wingdings 2" panose="05020102010507070707" pitchFamily="18" charset="2"/>
+              <a:buChar char=""/>
+              <a:defRPr sz="1800" kern="1200">
+                <a:solidFill>
+                  <a:schemeClr val="tx2"/>
+                </a:solidFill>
+                <a:latin typeface="+mn-lt"/>
+                <a:ea typeface="+mn-ea"/>
+                <a:cs typeface="+mn-cs"/>
+              </a:defRPr>
+            </a:lvl1pPr>
+            <a:lvl2pPr marL="630000" indent="-306000" algn="l" defTabSz="457200" rtl="0" eaLnBrk="1" latinLnBrk="0" hangingPunct="1">
+              <a:spcBef>
+                <a:spcPct val="20000"/>
+              </a:spcBef>
+              <a:spcAft>
+                <a:spcPts val="600"/>
+              </a:spcAft>
+              <a:buClr>
+                <a:schemeClr val="accent2"/>
+              </a:buClr>
+              <a:buSzPct val="92000"/>
+              <a:buFont typeface="Wingdings 2" panose="05020102010507070707" pitchFamily="18" charset="2"/>
+              <a:buChar char=""/>
+              <a:defRPr sz="1600" kern="1200">
+                <a:solidFill>
+                  <a:schemeClr val="tx2"/>
+                </a:solidFill>
+                <a:latin typeface="+mn-lt"/>
+                <a:ea typeface="+mn-ea"/>
+                <a:cs typeface="+mn-cs"/>
+              </a:defRPr>
+            </a:lvl2pPr>
+            <a:lvl3pPr marL="900000" indent="-270000" algn="l" defTabSz="457200" rtl="0" eaLnBrk="1" latinLnBrk="0" hangingPunct="1">
+              <a:spcBef>
+                <a:spcPct val="20000"/>
+              </a:spcBef>
+              <a:spcAft>
+                <a:spcPts val="600"/>
+              </a:spcAft>
+              <a:buClr>
+                <a:schemeClr val="accent2"/>
+              </a:buClr>
+              <a:buSzPct val="92000"/>
+              <a:buFont typeface="Wingdings 2" panose="05020102010507070707" pitchFamily="18" charset="2"/>
+              <a:buChar char=""/>
+              <a:defRPr sz="1400" kern="1200">
+                <a:solidFill>
+                  <a:schemeClr val="tx2"/>
+                </a:solidFill>
+                <a:latin typeface="+mn-lt"/>
+                <a:ea typeface="+mn-ea"/>
+                <a:cs typeface="+mn-cs"/>
+              </a:defRPr>
+            </a:lvl3pPr>
+            <a:lvl4pPr marL="1242000" indent="-234000" algn="l" defTabSz="457200" rtl="0" eaLnBrk="1" latinLnBrk="0" hangingPunct="1">
+              <a:spcBef>
+                <a:spcPct val="20000"/>
+              </a:spcBef>
+              <a:spcAft>
+                <a:spcPts val="600"/>
+              </a:spcAft>
+              <a:buClr>
+                <a:schemeClr val="accent2"/>
+              </a:buClr>
+              <a:buSzPct val="92000"/>
+              <a:buFont typeface="Wingdings 2" panose="05020102010507070707" pitchFamily="18" charset="2"/>
+              <a:buChar char=""/>
+              <a:defRPr sz="1200" kern="1200">
+                <a:solidFill>
+                  <a:schemeClr val="tx2"/>
+                </a:solidFill>
+                <a:latin typeface="+mn-lt"/>
+                <a:ea typeface="+mn-ea"/>
+                <a:cs typeface="+mn-cs"/>
+              </a:defRPr>
+            </a:lvl4pPr>
+            <a:lvl5pPr marL="1602000" indent="-234000" algn="l" defTabSz="457200" rtl="0" eaLnBrk="1" latinLnBrk="0" hangingPunct="1">
+              <a:spcBef>
+                <a:spcPct val="20000"/>
+              </a:spcBef>
+              <a:spcAft>
+                <a:spcPts val="600"/>
+              </a:spcAft>
+              <a:buClr>
+                <a:schemeClr val="accent2"/>
+              </a:buClr>
+              <a:buSzPct val="92000"/>
+              <a:buFont typeface="Wingdings 2" panose="05020102010507070707" pitchFamily="18" charset="2"/>
+              <a:buChar char=""/>
+              <a:defRPr sz="1200" kern="1200">
+                <a:solidFill>
+                  <a:schemeClr val="tx2"/>
+                </a:solidFill>
+                <a:latin typeface="+mn-lt"/>
+                <a:ea typeface="+mn-ea"/>
+                <a:cs typeface="+mn-cs"/>
+              </a:defRPr>
+            </a:lvl5pPr>
+            <a:lvl6pPr marL="1900000" indent="-228600" algn="l" defTabSz="457200" rtl="0" eaLnBrk="1" latinLnBrk="0" hangingPunct="1">
+              <a:spcBef>
+                <a:spcPct val="20000"/>
+              </a:spcBef>
+              <a:spcAft>
+                <a:spcPts val="600"/>
+              </a:spcAft>
+              <a:buClr>
+                <a:schemeClr val="accent2"/>
+              </a:buClr>
+              <a:buSzPct val="92000"/>
+              <a:buFont typeface="Wingdings 2" panose="05020102010507070707" pitchFamily="18" charset="2"/>
+              <a:buChar char=""/>
+              <a:defRPr sz="1200" kern="1200">
+                <a:solidFill>
+                  <a:schemeClr val="tx2"/>
+                </a:solidFill>
+                <a:latin typeface="+mn-lt"/>
+                <a:ea typeface="+mn-ea"/>
+                <a:cs typeface="+mn-cs"/>
+              </a:defRPr>
+            </a:lvl6pPr>
+            <a:lvl7pPr marL="2200000" indent="-228600" algn="l" defTabSz="457200" rtl="0" eaLnBrk="1" latinLnBrk="0" hangingPunct="1">
+              <a:spcBef>
+                <a:spcPct val="20000"/>
+              </a:spcBef>
+              <a:spcAft>
+                <a:spcPts val="600"/>
+              </a:spcAft>
+              <a:buClr>
+                <a:schemeClr val="accent2"/>
+              </a:buClr>
+              <a:buSzPct val="92000"/>
+              <a:buFont typeface="Wingdings 2" panose="05020102010507070707" pitchFamily="18" charset="2"/>
+              <a:buChar char=""/>
+              <a:defRPr sz="1200" kern="1200">
+                <a:solidFill>
+                  <a:schemeClr val="tx2"/>
+                </a:solidFill>
+                <a:latin typeface="+mn-lt"/>
+                <a:ea typeface="+mn-ea"/>
+                <a:cs typeface="+mn-cs"/>
+              </a:defRPr>
+            </a:lvl7pPr>
+            <a:lvl8pPr marL="2500000" indent="-228600" algn="l" defTabSz="457200" rtl="0" eaLnBrk="1" latinLnBrk="0" hangingPunct="1">
+              <a:spcBef>
+                <a:spcPct val="20000"/>
+              </a:spcBef>
+              <a:spcAft>
+                <a:spcPts val="600"/>
+              </a:spcAft>
+              <a:buClr>
+                <a:schemeClr val="accent2"/>
+              </a:buClr>
+              <a:buSzPct val="92000"/>
+              <a:buFont typeface="Wingdings 2" panose="05020102010507070707" pitchFamily="18" charset="2"/>
+              <a:buChar char=""/>
+              <a:defRPr sz="1200" kern="1200">
+                <a:solidFill>
+                  <a:schemeClr val="tx2"/>
+                </a:solidFill>
+                <a:latin typeface="+mn-lt"/>
+                <a:ea typeface="+mn-ea"/>
+                <a:cs typeface="+mn-cs"/>
+              </a:defRPr>
+            </a:lvl8pPr>
+            <a:lvl9pPr marL="2800000" indent="-228600" algn="l" defTabSz="457200" rtl="0" eaLnBrk="1" latinLnBrk="0" hangingPunct="1">
+              <a:spcBef>
+                <a:spcPct val="20000"/>
+              </a:spcBef>
+              <a:spcAft>
+                <a:spcPts val="600"/>
+              </a:spcAft>
+              <a:buClr>
+                <a:schemeClr val="accent2"/>
+              </a:buClr>
+              <a:buSzPct val="92000"/>
+              <a:buFont typeface="Wingdings 2" panose="05020102010507070707" pitchFamily="18" charset="2"/>
+              <a:buChar char=""/>
+              <a:defRPr sz="1200" kern="1200">
+                <a:solidFill>
+                  <a:schemeClr val="tx2"/>
+                </a:solidFill>
+                <a:latin typeface="+mn-lt"/>
+                <a:ea typeface="+mn-ea"/>
+                <a:cs typeface="+mn-cs"/>
+              </a:defRPr>
+            </a:lvl9pPr>
+          </a:lstStyle>
+          <a:p>
+            <a:r>
+              <a:rPr lang="en-US" sz="1600" b="1" dirty="0"/>
+              <a:t>Laczy Miklós – Frontend Developer</a:t>
+            </a:r>
+          </a:p>
+          <a:p>
+            <a:r>
+              <a:rPr lang="en-US" sz="1600" dirty="0"/>
+              <a:t>Role: Responsible for the user interface, client-side logic, and user experience.</a:t>
+            </a:r>
+          </a:p>
+          <a:p>
+            <a:r>
+              <a:rPr lang="en-US" sz="1600" dirty="0"/>
+              <a:t>Key Contributions: </a:t>
+            </a:r>
+          </a:p>
+          <a:p>
+            <a:pPr lvl="1"/>
+            <a:r>
+              <a:rPr lang="en-US" dirty="0"/>
+              <a:t>Built a responsive and interactive UI using React.js and React Router .</a:t>
+            </a:r>
+          </a:p>
+          <a:p>
+            <a:pPr lvl="1"/>
+            <a:r>
+              <a:rPr lang="en-US" dirty="0"/>
+              <a:t>Designed reusable components such as </a:t>
+            </a:r>
+            <a:r>
+              <a:rPr lang="en-US" dirty="0" err="1"/>
+              <a:t>PerfumeCard</a:t>
+            </a:r>
+            <a:r>
+              <a:rPr lang="en-US" dirty="0"/>
+              <a:t> , Sidebar , and Pagination for seamless navigation.</a:t>
+            </a:r>
+          </a:p>
+          <a:p>
+            <a:pPr lvl="1"/>
+            <a:r>
+              <a:rPr lang="en-US" dirty="0"/>
+              <a:t>Integrated frontend with backend APIs using </a:t>
+            </a:r>
+            <a:r>
+              <a:rPr lang="en-US" dirty="0" err="1"/>
+              <a:t>Axios</a:t>
+            </a:r>
+            <a:r>
+              <a:rPr lang="en-US" dirty="0"/>
+              <a:t> for dynamic data fetching.</a:t>
+            </a:r>
+          </a:p>
+          <a:p>
+            <a:pPr lvl="1"/>
+            <a:r>
+              <a:rPr lang="en-US" dirty="0"/>
+              <a:t>Implemented advanced search and filtering functionality on the frontend to enhance user experience.</a:t>
+            </a:r>
+          </a:p>
+          <a:p>
+            <a:pPr lvl="1"/>
+            <a:r>
+              <a:rPr lang="hu-HU" dirty="0"/>
+              <a:t>M</a:t>
+            </a:r>
+            <a:r>
+              <a:rPr lang="en-US" dirty="0" err="1"/>
+              <a:t>obile</a:t>
+            </a:r>
+            <a:r>
+              <a:rPr lang="en-US" dirty="0"/>
+              <a:t> responsiveness using modern CSS techniques.</a:t>
+            </a:r>
+          </a:p>
+          <a:p>
+            <a:pPr marL="0" indent="0">
+              <a:buNone/>
+            </a:pPr>
+            <a:endParaRPr lang="hu-HU" dirty="0"/>
+          </a:p>
+        </p:txBody>
+      </p:sp>
+    </p:spTree>
+    <p:extLst>
+      <p:ext uri="{BB962C8B-B14F-4D97-AF65-F5344CB8AC3E}">
+        <p14:creationId xmlns:p14="http://schemas.microsoft.com/office/powerpoint/2010/main" val="1678685407"/>
+      </p:ext>
+    </p:extLst>
+  </p:cSld>
+  <p:clrMapOvr>
+    <a:masterClrMapping/>
+  </p:clrMapOvr>
+</p:sld>
+</file>
+
 <file path=ppt/slides/slide2.xml><?xml version="1.0" encoding="utf-8"?>
 <p:sld xmlns:a="http://schemas.openxmlformats.org/drawingml/2006/main" xmlns:r="http://schemas.openxmlformats.org/officeDocument/2006/relationships" xmlns:p="http://schemas.openxmlformats.org/presentationml/2006/main">
   <p:cSld>
@@ -4856,7 +7009,7 @@
         </p:blipFill>
         <p:spPr>
           <a:xfrm>
-            <a:off x="218197" y="4817395"/>
+            <a:off x="186549" y="3949382"/>
             <a:ext cx="5291874" cy="1338449"/>
           </a:xfrm>
           <a:prstGeom prst="rect">
@@ -5052,6 +7205,320 @@
     <p:extLst>
       <p:ext uri="{BB962C8B-B14F-4D97-AF65-F5344CB8AC3E}">
         <p14:creationId xmlns:p14="http://schemas.microsoft.com/office/powerpoint/2010/main" val="4210194865"/>
+      </p:ext>
+    </p:extLst>
+  </p:cSld>
+  <p:clrMapOvr>
+    <a:masterClrMapping/>
+  </p:clrMapOvr>
+</p:sld>
+</file>
+
+<file path=ppt/slides/slide9.xml><?xml version="1.0" encoding="utf-8"?>
+<p:sld xmlns:a="http://schemas.openxmlformats.org/drawingml/2006/main" xmlns:r="http://schemas.openxmlformats.org/officeDocument/2006/relationships" xmlns:p="http://schemas.openxmlformats.org/presentationml/2006/main">
+  <p:cSld>
+    <p:spTree>
+      <p:nvGrpSpPr>
+        <p:cNvPr id="1" name=""/>
+        <p:cNvGrpSpPr/>
+        <p:nvPr/>
+      </p:nvGrpSpPr>
+      <p:grpSpPr>
+        <a:xfrm>
+          <a:off x="0" y="0"/>
+          <a:ext cx="0" cy="0"/>
+          <a:chOff x="0" y="0"/>
+          <a:chExt cx="0" cy="0"/>
+        </a:xfrm>
+      </p:grpSpPr>
+      <p:sp>
+        <p:nvSpPr>
+          <p:cNvPr id="2" name="Cím 1">
+            <a:extLst>
+              <a:ext uri="{FF2B5EF4-FFF2-40B4-BE49-F238E27FC236}">
+                <a16:creationId xmlns:a16="http://schemas.microsoft.com/office/drawing/2014/main" id="{A7131CA5-32EC-4BE3-B93B-F2477B22CDA3}"/>
+              </a:ext>
+            </a:extLst>
+          </p:cNvPr>
+          <p:cNvSpPr>
+            <a:spLocks noGrp="1"/>
+          </p:cNvSpPr>
+          <p:nvPr>
+            <p:ph type="title"/>
+          </p:nvPr>
+        </p:nvSpPr>
+        <p:spPr/>
+        <p:txBody>
+          <a:bodyPr/>
+          <a:lstStyle/>
+          <a:p>
+            <a:r>
+              <a:rPr lang="hu-HU" dirty="0"/>
+              <a:t>Program</a:t>
+            </a:r>
+          </a:p>
+        </p:txBody>
+      </p:sp>
+      <p:sp>
+        <p:nvSpPr>
+          <p:cNvPr id="6" name="Szövegdoboz 5">
+            <a:extLst>
+              <a:ext uri="{FF2B5EF4-FFF2-40B4-BE49-F238E27FC236}">
+                <a16:creationId xmlns:a16="http://schemas.microsoft.com/office/drawing/2014/main" id="{FACAE20D-C648-4CA8-B24F-CFECCCCB803C}"/>
+              </a:ext>
+            </a:extLst>
+          </p:cNvPr>
+          <p:cNvSpPr txBox="1"/>
+          <p:nvPr/>
+        </p:nvSpPr>
+        <p:spPr>
+          <a:xfrm>
+            <a:off x="932155" y="2494625"/>
+            <a:ext cx="3595456" cy="2031325"/>
+          </a:xfrm>
+          <a:prstGeom prst="rect">
+            <a:avLst/>
+          </a:prstGeom>
+          <a:noFill/>
+        </p:spPr>
+        <p:txBody>
+          <a:bodyPr wrap="square" rtlCol="0">
+            <a:spAutoFit/>
+          </a:bodyPr>
+          <a:lstStyle/>
+          <a:p>
+            <a:pPr algn="ctr"/>
+            <a:r>
+              <a:rPr lang="hu-HU" dirty="0"/>
+              <a:t>Frontend</a:t>
+            </a:r>
+          </a:p>
+          <a:p>
+            <a:pPr algn="ctr"/>
+            <a:endParaRPr lang="hu-HU" dirty="0"/>
+          </a:p>
+          <a:p>
+            <a:pPr marL="285750" indent="-285750">
+              <a:buFont typeface="Arial" panose="020B0604020202020204" pitchFamily="34" charset="0"/>
+              <a:buChar char="•"/>
+            </a:pPr>
+            <a:r>
+              <a:rPr lang="hu-HU" dirty="0" err="1"/>
+              <a:t>React</a:t>
+            </a:r>
+            <a:endParaRPr lang="hu-HU" dirty="0"/>
+          </a:p>
+          <a:p>
+            <a:pPr marL="285750" indent="-285750">
+              <a:buFont typeface="Arial" panose="020B0604020202020204" pitchFamily="34" charset="0"/>
+              <a:buChar char="•"/>
+            </a:pPr>
+            <a:r>
+              <a:rPr lang="hu-HU" dirty="0"/>
+              <a:t>CSS</a:t>
+            </a:r>
+          </a:p>
+          <a:p>
+            <a:pPr marL="285750" indent="-285750">
+              <a:buFont typeface="Arial" panose="020B0604020202020204" pitchFamily="34" charset="0"/>
+              <a:buChar char="•"/>
+            </a:pPr>
+            <a:r>
+              <a:rPr lang="hu-HU" dirty="0" err="1"/>
+              <a:t>Bootstrap</a:t>
+            </a:r>
+            <a:endParaRPr lang="hu-HU" dirty="0"/>
+          </a:p>
+          <a:p>
+            <a:pPr marL="285750" indent="-285750">
+              <a:buFont typeface="Arial" panose="020B0604020202020204" pitchFamily="34" charset="0"/>
+              <a:buChar char="•"/>
+            </a:pPr>
+            <a:r>
+              <a:rPr lang="hu-HU" dirty="0"/>
+              <a:t>JS</a:t>
+            </a:r>
+          </a:p>
+          <a:p>
+            <a:pPr marL="285750" indent="-285750">
+              <a:buFont typeface="Arial" panose="020B0604020202020204" pitchFamily="34" charset="0"/>
+              <a:buChar char="•"/>
+            </a:pPr>
+            <a:endParaRPr lang="hu-HU" dirty="0"/>
+          </a:p>
+        </p:txBody>
+      </p:sp>
+      <p:sp>
+        <p:nvSpPr>
+          <p:cNvPr id="7" name="Szövegdoboz 6">
+            <a:extLst>
+              <a:ext uri="{FF2B5EF4-FFF2-40B4-BE49-F238E27FC236}">
+                <a16:creationId xmlns:a16="http://schemas.microsoft.com/office/drawing/2014/main" id="{411DF678-7C37-49BA-972C-08DED16AAEB6}"/>
+              </a:ext>
+            </a:extLst>
+          </p:cNvPr>
+          <p:cNvSpPr txBox="1"/>
+          <p:nvPr/>
+        </p:nvSpPr>
+        <p:spPr>
+          <a:xfrm>
+            <a:off x="4298272" y="2494625"/>
+            <a:ext cx="3595456" cy="1200329"/>
+          </a:xfrm>
+          <a:prstGeom prst="rect">
+            <a:avLst/>
+          </a:prstGeom>
+          <a:noFill/>
+        </p:spPr>
+        <p:txBody>
+          <a:bodyPr wrap="square" rtlCol="0">
+            <a:spAutoFit/>
+          </a:bodyPr>
+          <a:lstStyle/>
+          <a:p>
+            <a:pPr algn="ctr"/>
+            <a:r>
+              <a:rPr lang="hu-HU" dirty="0"/>
+              <a:t>Backend</a:t>
+            </a:r>
+          </a:p>
+          <a:p>
+            <a:pPr algn="ctr"/>
+            <a:endParaRPr lang="hu-HU" dirty="0"/>
+          </a:p>
+          <a:p>
+            <a:pPr marL="285750" indent="-285750">
+              <a:buFont typeface="Arial" panose="020B0604020202020204" pitchFamily="34" charset="0"/>
+              <a:buChar char="•"/>
+            </a:pPr>
+            <a:r>
+              <a:rPr lang="hu-HU" dirty="0"/>
+              <a:t>Node.js</a:t>
+            </a:r>
+          </a:p>
+          <a:p>
+            <a:pPr marL="285750" indent="-285750">
+              <a:buFont typeface="Arial" panose="020B0604020202020204" pitchFamily="34" charset="0"/>
+              <a:buChar char="•"/>
+            </a:pPr>
+            <a:r>
+              <a:rPr lang="hu-HU" dirty="0"/>
+              <a:t>Express.js</a:t>
+            </a:r>
+          </a:p>
+        </p:txBody>
+      </p:sp>
+      <p:sp>
+        <p:nvSpPr>
+          <p:cNvPr id="8" name="Szövegdoboz 7">
+            <a:extLst>
+              <a:ext uri="{FF2B5EF4-FFF2-40B4-BE49-F238E27FC236}">
+                <a16:creationId xmlns:a16="http://schemas.microsoft.com/office/drawing/2014/main" id="{0C8B3786-3EDD-451E-93C3-AFDE8AE4C998}"/>
+              </a:ext>
+            </a:extLst>
+          </p:cNvPr>
+          <p:cNvSpPr txBox="1"/>
+          <p:nvPr/>
+        </p:nvSpPr>
+        <p:spPr>
+          <a:xfrm>
+            <a:off x="7664389" y="2494625"/>
+            <a:ext cx="3595456" cy="923330"/>
+          </a:xfrm>
+          <a:prstGeom prst="rect">
+            <a:avLst/>
+          </a:prstGeom>
+          <a:noFill/>
+        </p:spPr>
+        <p:txBody>
+          <a:bodyPr wrap="square" rtlCol="0">
+            <a:spAutoFit/>
+          </a:bodyPr>
+          <a:lstStyle/>
+          <a:p>
+            <a:pPr algn="ctr"/>
+            <a:r>
+              <a:rPr lang="hu-HU" dirty="0" err="1"/>
+              <a:t>Database</a:t>
+            </a:r>
+            <a:r>
+              <a:rPr lang="hu-HU" dirty="0"/>
+              <a:t> – </a:t>
+            </a:r>
+            <a:r>
+              <a:rPr lang="hu-HU" dirty="0" err="1"/>
+              <a:t>MySQL</a:t>
+            </a:r>
+            <a:endParaRPr lang="hu-HU" dirty="0"/>
+          </a:p>
+          <a:p>
+            <a:pPr algn="ctr"/>
+            <a:endParaRPr lang="hu-HU" dirty="0"/>
+          </a:p>
+          <a:p>
+            <a:pPr marL="285750" indent="-285750">
+              <a:buFont typeface="Arial" panose="020B0604020202020204" pitchFamily="34" charset="0"/>
+              <a:buChar char="•"/>
+            </a:pPr>
+            <a:r>
+              <a:rPr lang="hu-HU" dirty="0" err="1"/>
+              <a:t>phpMyAdmin</a:t>
+            </a:r>
+            <a:endParaRPr lang="hu-HU" dirty="0"/>
+          </a:p>
+        </p:txBody>
+      </p:sp>
+      <p:pic>
+        <p:nvPicPr>
+          <p:cNvPr id="1026" name="Picture 2" descr="Front End Wallpapers - Top Free Front End Backgrounds - WallpaperAccess">
+            <a:extLst>
+              <a:ext uri="{FF2B5EF4-FFF2-40B4-BE49-F238E27FC236}">
+                <a16:creationId xmlns:a16="http://schemas.microsoft.com/office/drawing/2014/main" id="{EF88833B-9F82-4669-8D31-2D595CB8775E}"/>
+              </a:ext>
+            </a:extLst>
+          </p:cNvPr>
+          <p:cNvPicPr>
+            <a:picLocks noChangeAspect="1" noChangeArrowheads="1"/>
+          </p:cNvPicPr>
+          <p:nvPr/>
+        </p:nvPicPr>
+        <p:blipFill>
+          <a:blip r:embed="rId2">
+            <a:extLst>
+              <a:ext uri="{28A0092B-C50C-407E-A947-70E740481C1C}">
+                <a14:useLocalDpi xmlns:a14="http://schemas.microsoft.com/office/drawing/2010/main" val="0"/>
+              </a:ext>
+            </a:extLst>
+          </a:blip>
+          <a:srcRect/>
+          <a:stretch>
+            <a:fillRect/>
+          </a:stretch>
+        </p:blipFill>
+        <p:spPr bwMode="auto">
+          <a:xfrm>
+            <a:off x="3828742" y="3934471"/>
+            <a:ext cx="4534516" cy="2550665"/>
+          </a:xfrm>
+          <a:prstGeom prst="rect">
+            <a:avLst/>
+          </a:prstGeom>
+          <a:noFill/>
+          <a:extLst>
+            <a:ext uri="{909E8E84-426E-40DD-AFC4-6F175D3DCCD1}">
+              <a14:hiddenFill xmlns:a14="http://schemas.microsoft.com/office/drawing/2010/main">
+                <a:solidFill>
+                  <a:srgbClr val="FFFFFF"/>
+                </a:solidFill>
+              </a14:hiddenFill>
+            </a:ext>
+          </a:extLst>
+        </p:spPr>
+      </p:pic>
+    </p:spTree>
+    <p:extLst>
+      <p:ext uri="{BB962C8B-B14F-4D97-AF65-F5344CB8AC3E}">
+        <p14:creationId xmlns:p14="http://schemas.microsoft.com/office/powerpoint/2010/main" val="738537628"/>
       </p:ext>
     </p:extLst>
   </p:cSld>

--- a/Parfümvilág.pptx
+++ b/Parfümvilág.pptx
@@ -20,6 +20,7 @@
     <p:sldId id="268" r:id="rId14"/>
     <p:sldId id="269" r:id="rId15"/>
     <p:sldId id="270" r:id="rId16"/>
+    <p:sldId id="271" r:id="rId17"/>
   </p:sldIdLst>
   <p:sldSz cx="12192000" cy="6858000"/>
   <p:notesSz cx="6858000" cy="9144000"/>
@@ -372,7 +373,7 @@
             <a:fld id="{B61BEF0D-F0BB-DE4B-95CE-6DB70DBA9567}" type="datetimeFigureOut">
               <a:rPr lang="en-US" dirty="0"/>
               <a:pPr/>
-              <a:t>4/7/2025</a:t>
+              <a:t>4/14/2025</a:t>
             </a:fld>
             <a:endParaRPr lang="en-US" dirty="0"/>
           </a:p>
@@ -631,7 +632,7 @@
             <a:fld id="{B61BEF0D-F0BB-DE4B-95CE-6DB70DBA9567}" type="datetimeFigureOut">
               <a:rPr lang="en-US" dirty="0"/>
               <a:pPr/>
-              <a:t>4/7/2025</a:t>
+              <a:t>4/14/2025</a:t>
             </a:fld>
             <a:endParaRPr lang="en-US" dirty="0"/>
           </a:p>
@@ -863,7 +864,7 @@
             <a:fld id="{B61BEF0D-F0BB-DE4B-95CE-6DB70DBA9567}" type="datetimeFigureOut">
               <a:rPr lang="en-US" dirty="0"/>
               <a:pPr/>
-              <a:t>4/7/2025</a:t>
+              <a:t>4/14/2025</a:t>
             </a:fld>
             <a:endParaRPr lang="en-US" dirty="0"/>
           </a:p>
@@ -1100,7 +1101,7 @@
             <a:fld id="{B61BEF0D-F0BB-DE4B-95CE-6DB70DBA9567}" type="datetimeFigureOut">
               <a:rPr lang="en-US" dirty="0"/>
               <a:pPr/>
-              <a:t>4/7/2025</a:t>
+              <a:t>4/14/2025</a:t>
             </a:fld>
             <a:endParaRPr lang="en-US" dirty="0"/>
           </a:p>
@@ -1404,7 +1405,7 @@
             <a:fld id="{B61BEF0D-F0BB-DE4B-95CE-6DB70DBA9567}" type="datetimeFigureOut">
               <a:rPr lang="en-US" dirty="0"/>
               <a:pPr/>
-              <a:t>4/7/2025</a:t>
+              <a:t>4/14/2025</a:t>
             </a:fld>
             <a:endParaRPr lang="en-US" dirty="0"/>
           </a:p>
@@ -1703,7 +1704,7 @@
             <a:fld id="{B61BEF0D-F0BB-DE4B-95CE-6DB70DBA9567}" type="datetimeFigureOut">
               <a:rPr lang="en-US" dirty="0"/>
               <a:pPr/>
-              <a:t>4/7/2025</a:t>
+              <a:t>4/14/2025</a:t>
             </a:fld>
             <a:endParaRPr lang="en-US" dirty="0"/>
           </a:p>
@@ -2122,7 +2123,7 @@
             <a:fld id="{B61BEF0D-F0BB-DE4B-95CE-6DB70DBA9567}" type="datetimeFigureOut">
               <a:rPr lang="en-US" dirty="0"/>
               <a:pPr/>
-              <a:t>4/7/2025</a:t>
+              <a:t>4/14/2025</a:t>
             </a:fld>
             <a:endParaRPr lang="en-US" dirty="0"/>
           </a:p>
@@ -2281,7 +2282,7 @@
             <a:fld id="{B61BEF0D-F0BB-DE4B-95CE-6DB70DBA9567}" type="datetimeFigureOut">
               <a:rPr lang="en-US" dirty="0"/>
               <a:pPr/>
-              <a:t>4/7/2025</a:t>
+              <a:t>4/14/2025</a:t>
             </a:fld>
             <a:endParaRPr lang="en-US" dirty="0"/>
           </a:p>
@@ -2373,7 +2374,7 @@
             <a:fld id="{B61BEF0D-F0BB-DE4B-95CE-6DB70DBA9567}" type="datetimeFigureOut">
               <a:rPr lang="en-US" dirty="0"/>
               <a:pPr/>
-              <a:t>4/7/2025</a:t>
+              <a:t>4/14/2025</a:t>
             </a:fld>
             <a:endParaRPr lang="en-US" dirty="0"/>
           </a:p>
@@ -2748,7 +2749,7 @@
             <a:fld id="{B61BEF0D-F0BB-DE4B-95CE-6DB70DBA9567}" type="datetimeFigureOut">
               <a:rPr lang="en-US" dirty="0"/>
               <a:pPr/>
-              <a:t>4/7/2025</a:t>
+              <a:t>4/14/2025</a:t>
             </a:fld>
             <a:endParaRPr lang="en-US" dirty="0"/>
           </a:p>
@@ -3034,7 +3035,7 @@
             <a:fld id="{B61BEF0D-F0BB-DE4B-95CE-6DB70DBA9567}" type="datetimeFigureOut">
               <a:rPr lang="en-US" dirty="0"/>
               <a:pPr/>
-              <a:t>4/7/2025</a:t>
+              <a:t>4/14/2025</a:t>
             </a:fld>
             <a:endParaRPr lang="en-US" dirty="0"/>
           </a:p>
@@ -3242,7 +3243,7 @@
             <a:fld id="{B61BEF0D-F0BB-DE4B-95CE-6DB70DBA9567}" type="datetimeFigureOut">
               <a:rPr lang="en-US" dirty="0"/>
               <a:pPr/>
-              <a:t>4/7/2025</a:t>
+              <a:t>4/14/2025</a:t>
             </a:fld>
             <a:endParaRPr lang="en-US" dirty="0"/>
           </a:p>
@@ -6059,6 +6060,97 @@
 </p:sld>
 </file>
 
+<file path=ppt/slides/slide16.xml><?xml version="1.0" encoding="utf-8"?>
+<p:sld xmlns:a="http://schemas.openxmlformats.org/drawingml/2006/main" xmlns:r="http://schemas.openxmlformats.org/officeDocument/2006/relationships" xmlns:p="http://schemas.openxmlformats.org/presentationml/2006/main">
+  <p:cSld>
+    <p:spTree>
+      <p:nvGrpSpPr>
+        <p:cNvPr id="1" name=""/>
+        <p:cNvGrpSpPr/>
+        <p:nvPr/>
+      </p:nvGrpSpPr>
+      <p:grpSpPr>
+        <a:xfrm>
+          <a:off x="0" y="0"/>
+          <a:ext cx="0" cy="0"/>
+          <a:chOff x="0" y="0"/>
+          <a:chExt cx="0" cy="0"/>
+        </a:xfrm>
+      </p:grpSpPr>
+      <p:sp>
+        <p:nvSpPr>
+          <p:cNvPr id="2" name="Cím 1">
+            <a:extLst>
+              <a:ext uri="{FF2B5EF4-FFF2-40B4-BE49-F238E27FC236}">
+                <a16:creationId xmlns:a16="http://schemas.microsoft.com/office/drawing/2014/main" id="{3275AF37-59E9-48B5-AE16-B097D70A70FF}"/>
+              </a:ext>
+            </a:extLst>
+          </p:cNvPr>
+          <p:cNvSpPr>
+            <a:spLocks noGrp="1"/>
+          </p:cNvSpPr>
+          <p:nvPr>
+            <p:ph type="ctrTitle"/>
+          </p:nvPr>
+        </p:nvSpPr>
+        <p:spPr/>
+        <p:txBody>
+          <a:bodyPr/>
+          <a:lstStyle/>
+          <a:p>
+            <a:r>
+              <a:rPr lang="hu-HU" dirty="0"/>
+              <a:t>Vége</a:t>
+            </a:r>
+          </a:p>
+        </p:txBody>
+      </p:sp>
+      <p:sp>
+        <p:nvSpPr>
+          <p:cNvPr id="3" name="Alcím 2">
+            <a:extLst>
+              <a:ext uri="{FF2B5EF4-FFF2-40B4-BE49-F238E27FC236}">
+                <a16:creationId xmlns:a16="http://schemas.microsoft.com/office/drawing/2014/main" id="{B940B7E8-8FB2-44A7-AD64-0CCF530DF63C}"/>
+              </a:ext>
+            </a:extLst>
+          </p:cNvPr>
+          <p:cNvSpPr>
+            <a:spLocks noGrp="1"/>
+          </p:cNvSpPr>
+          <p:nvPr>
+            <p:ph type="subTitle" idx="1"/>
+          </p:nvPr>
+        </p:nvSpPr>
+        <p:spPr>
+          <a:xfrm>
+            <a:off x="581191" y="2495444"/>
+            <a:ext cx="10993546" cy="590321"/>
+          </a:xfrm>
+        </p:spPr>
+        <p:txBody>
+          <a:bodyPr/>
+          <a:lstStyle/>
+          <a:p>
+            <a:r>
+              <a:rPr lang="hu-HU" dirty="0"/>
+              <a:t>Köszönjük a figyelmet!</a:t>
+            </a:r>
+          </a:p>
+        </p:txBody>
+      </p:sp>
+    </p:spTree>
+    <p:extLst>
+      <p:ext uri="{BB962C8B-B14F-4D97-AF65-F5344CB8AC3E}">
+        <p14:creationId xmlns:p14="http://schemas.microsoft.com/office/powerpoint/2010/main" val="14961980"/>
+      </p:ext>
+    </p:extLst>
+  </p:cSld>
+  <p:clrMapOvr>
+    <a:masterClrMapping/>
+  </p:clrMapOvr>
+</p:sld>
+</file>
+
 <file path=ppt/slides/slide2.xml><?xml version="1.0" encoding="utf-8"?>
 <p:sld xmlns:a="http://schemas.openxmlformats.org/drawingml/2006/main" xmlns:r="http://schemas.openxmlformats.org/officeDocument/2006/relationships" xmlns:p="http://schemas.openxmlformats.org/presentationml/2006/main">
   <p:cSld>
